--- a/data-eng/decks/w5d3s1.pptx
+++ b/data-eng/decks/w5d3s1.pptx
@@ -3100,7 +3100,7 @@
       <p:grpSpPr/>
       <p:sp>
         <p:nvSpPr>
-          <p:cNvPr id="2" name="Oval 1"/>
+          <p:cNvPr id="2" name="deckgen:decor"/>
           <p:cNvSpPr/>
           <p:nvPr/>
         </p:nvSpPr>
@@ -3130,7 +3130,7 @@
       </p:sp>
       <p:sp>
         <p:nvSpPr>
-          <p:cNvPr id="3" name="Oval 2"/>
+          <p:cNvPr id="3" name="deckgen:decor"/>
           <p:cNvSpPr/>
           <p:nvPr/>
         </p:nvSpPr>
@@ -3160,7 +3160,7 @@
       </p:sp>
       <p:sp>
         <p:nvSpPr>
-          <p:cNvPr id="4" name="Oval 3"/>
+          <p:cNvPr id="4" name="deckgen:decor"/>
           <p:cNvSpPr/>
           <p:nvPr/>
         </p:nvSpPr>
@@ -3190,7 +3190,7 @@
       </p:sp>
       <p:sp>
         <p:nvSpPr>
-          <p:cNvPr id="5" name="Rectangle 4"/>
+          <p:cNvPr id="5" name="deckgen:decor"/>
           <p:cNvSpPr/>
           <p:nvPr/>
         </p:nvSpPr>
@@ -3220,7 +3220,7 @@
       </p:sp>
       <p:sp>
         <p:nvSpPr>
-          <p:cNvPr id="6" name="Oval 5"/>
+          <p:cNvPr id="6" name="deckgen:decor"/>
           <p:cNvSpPr/>
           <p:nvPr/>
         </p:nvSpPr>
@@ -3250,7 +3250,7 @@
       </p:sp>
       <p:sp>
         <p:nvSpPr>
-          <p:cNvPr id="7" name="Oval 6"/>
+          <p:cNvPr id="7" name="deckgen:decor"/>
           <p:cNvSpPr/>
           <p:nvPr/>
         </p:nvSpPr>
@@ -3280,7 +3280,7 @@
       </p:sp>
       <p:sp>
         <p:nvSpPr>
-          <p:cNvPr id="8" name="Oval 7"/>
+          <p:cNvPr id="8" name="deckgen:decor"/>
           <p:cNvSpPr/>
           <p:nvPr/>
         </p:nvSpPr>
@@ -3310,7 +3310,7 @@
       </p:sp>
       <p:sp>
         <p:nvSpPr>
-          <p:cNvPr id="9" name="Oval 8"/>
+          <p:cNvPr id="9" name="deckgen:decor"/>
           <p:cNvSpPr/>
           <p:nvPr/>
         </p:nvSpPr>
@@ -3340,7 +3340,7 @@
       </p:sp>
       <p:sp>
         <p:nvSpPr>
-          <p:cNvPr id="10" name="Rectangle 9"/>
+          <p:cNvPr id="10" name="deckgen:decor"/>
           <p:cNvSpPr/>
           <p:nvPr/>
         </p:nvSpPr>
@@ -3600,7 +3600,7 @@
       <p:grpSpPr/>
       <p:sp>
         <p:nvSpPr>
-          <p:cNvPr id="2" name="Oval 1"/>
+          <p:cNvPr id="2" name="deckgen:decor"/>
           <p:cNvSpPr/>
           <p:nvPr/>
         </p:nvSpPr>
@@ -3630,7 +3630,7 @@
       </p:sp>
       <p:sp>
         <p:nvSpPr>
-          <p:cNvPr id="3" name="Oval 2"/>
+          <p:cNvPr id="3" name="deckgen:decor"/>
           <p:cNvSpPr/>
           <p:nvPr/>
         </p:nvSpPr>
@@ -3660,7 +3660,7 @@
       </p:sp>
       <p:sp>
         <p:nvSpPr>
-          <p:cNvPr id="4" name="Oval 3"/>
+          <p:cNvPr id="4" name="deckgen:decor"/>
           <p:cNvSpPr/>
           <p:nvPr/>
         </p:nvSpPr>
@@ -4087,7 +4087,7 @@
                 <a:ea typeface="Pretendard"/>
                 <a:cs typeface="Pretendard"/>
               </a:rPr>
-              <a:t>라이브러리 버전은 Spark·Scala 버전과 맞아야 한다</a:t>
+              <a:t>버전이 Spark·Scala 와 어긋나면 클래스·메서드를 못 찾는다</a:t>
             </a:r>
           </a:p>
         </p:txBody>
@@ -4379,7 +4379,7 @@
                 <a:ea typeface="Pretendard"/>
                 <a:cs typeface="Pretendard"/>
               </a:rPr>
-              <a:t>카탈로그 타입은 혼자 쓰면 hadoop, 엔진끼리 공유하면 rest</a:t>
+              <a:t>warehouse 는 버킷 안 폴더 하나 — s3a://warehouse/lake</a:t>
             </a:r>
           </a:p>
         </p:txBody>
@@ -4525,7 +4525,7 @@
                 <a:ea typeface="Pretendard"/>
                 <a:cs typeface="Pretendard"/>
               </a:rPr>
-              <a:t>MinIO 에는 path.style.access=true 가 필수다</a:t>
+              <a:t>혼자 쓰면 hadoop, 엔진끼리 공유하면 rest · MinIO 엔 path style</a:t>
             </a:r>
           </a:p>
         </p:txBody>
@@ -4662,7 +4662,7 @@
       <p:grpSpPr/>
       <p:sp>
         <p:nvSpPr>
-          <p:cNvPr id="2" name="Oval 1"/>
+          <p:cNvPr id="2" name="deckgen:decor"/>
           <p:cNvSpPr/>
           <p:nvPr/>
         </p:nvSpPr>
@@ -4692,7 +4692,7 @@
       </p:sp>
       <p:sp>
         <p:nvSpPr>
-          <p:cNvPr id="3" name="Oval 2"/>
+          <p:cNvPr id="3" name="deckgen:decor"/>
           <p:cNvSpPr/>
           <p:nvPr/>
         </p:nvSpPr>
@@ -4868,7 +4868,7 @@
                 <a:ea typeface="Pretendard"/>
                 <a:cs typeface="Pretendard"/>
               </a:rPr>
-              <a:t>5-2 compose 에 MinIO 를 합치고, 이 설정을 --conf 로 넣어 Parquet 왕복으로 연결을 확인합니다</a:t>
+              <a:t>5-2 compose 에 MinIO 를 붙이고, 이 설정을 lake-pyspark.sh 에 담아 Parquet 왕복으로 연결을 확인합니다</a:t>
             </a:r>
           </a:p>
         </p:txBody>
@@ -4984,7 +4984,7 @@
                 <a:ea typeface="Pretendard"/>
                 <a:cs typeface="Pretendard"/>
               </a:rPr>
-              <a:t>compose 에 minio 서비스 추가 · warehouse 버킷</a:t>
+              <a:t>compose 에 minio 추가 · warehouse 버킷</a:t>
             </a:r>
           </a:p>
         </p:txBody>
@@ -5100,7 +5100,7 @@
                 <a:ea typeface="Pretendard"/>
                 <a:cs typeface="Pretendard"/>
               </a:rPr>
-              <a:t>--packages · --conf 로 PySpark 띄우기</a:t>
+              <a:t>bash lake-pyspark.sh — 첫 실행 jar 1~2분</a:t>
             </a:r>
           </a:p>
         </p:txBody>
@@ -5332,7 +5332,7 @@
                 <a:ea typeface="Pretendard"/>
                 <a:cs typeface="Pretendard"/>
               </a:rPr>
-              <a:t>일부러 틀려 오류 세 가지 구분</a:t>
+              <a:t>일부러 틀려 열쇠·주소·path style 오류 구분</a:t>
             </a:r>
           </a:p>
         </p:txBody>
@@ -5469,7 +5469,7 @@
       <p:grpSpPr/>
       <p:sp>
         <p:nvSpPr>
-          <p:cNvPr id="2" name="Oval 1"/>
+          <p:cNvPr id="2" name="deckgen:decor"/>
           <p:cNvSpPr/>
           <p:nvPr/>
         </p:nvSpPr>
@@ -5499,7 +5499,7 @@
       </p:sp>
       <p:sp>
         <p:nvSpPr>
-          <p:cNvPr id="3" name="Oval 2"/>
+          <p:cNvPr id="3" name="deckgen:decor"/>
           <p:cNvSpPr/>
           <p:nvPr/>
         </p:nvSpPr>
@@ -5529,7 +5529,7 @@
       </p:sp>
       <p:sp>
         <p:nvSpPr>
-          <p:cNvPr id="4" name="Oval 3"/>
+          <p:cNvPr id="4" name="deckgen:decor"/>
           <p:cNvSpPr/>
           <p:nvPr/>
         </p:nvSpPr>
@@ -6248,7 +6248,7 @@
                 <a:ea typeface="Pretendard"/>
                 <a:cs typeface="Pretendard"/>
               </a:rPr>
-              <a:t>카탈로그 타입 hadoop 과 rest 를 언제 고를지 말할 수 있다</a:t>
+              <a:t>warehouse 값과 카탈로그 타입(hadoop · rest)을 고른 이유를 말한다</a:t>
             </a:r>
           </a:p>
         </p:txBody>
@@ -6323,7 +6323,7 @@
                 <a:ea typeface="Pretendard"/>
                 <a:cs typeface="Pretendard"/>
               </a:rPr>
-              <a:t>다음 1.5H 실습에서 이 설정을 --conf 로 직접 넣어 MinIO 왕복을 확인합니다</a:t>
+              <a:t>다음 1.5H 실습에서 이 설정을 lake-pyspark.sh 에 담아 MinIO 왕복을 확인합니다</a:t>
             </a:r>
           </a:p>
         </p:txBody>
@@ -6460,7 +6460,7 @@
       <p:grpSpPr/>
       <p:sp>
         <p:nvSpPr>
-          <p:cNvPr id="2" name="Oval 1"/>
+          <p:cNvPr id="2" name="deckgen:decor"/>
           <p:cNvSpPr/>
           <p:nvPr/>
         </p:nvSpPr>
@@ -6490,7 +6490,7 @@
       </p:sp>
       <p:sp>
         <p:nvSpPr>
-          <p:cNvPr id="3" name="Oval 2"/>
+          <p:cNvPr id="3" name="deckgen:decor"/>
           <p:cNvSpPr/>
           <p:nvPr/>
         </p:nvSpPr>
@@ -6520,7 +6520,7 @@
       </p:sp>
       <p:sp>
         <p:nvSpPr>
-          <p:cNvPr id="4" name="Oval 3"/>
+          <p:cNvPr id="4" name="deckgen:decor"/>
           <p:cNvSpPr/>
           <p:nvPr/>
         </p:nvSpPr>
@@ -7476,7 +7476,7 @@
                 <a:ea typeface="Pretendard"/>
                 <a:cs typeface="Pretendard"/>
               </a:rPr>
-              <a:t>주소 체계만 바뀔 뿐 Spark 코드는 그대로 — 4-1 의 「S3 API 가 표준이라 주소만 바꾼다」와 같은 이야기</a:t>
+              <a:t>주소 앞부분만 바뀐다 — file:// · hdfs:// · s3a://버킷/키(오늘) · gs:// · Spark 코드는 그대로</a:t>
             </a:r>
           </a:p>
         </p:txBody>
@@ -7654,7 +7654,7 @@
       <p:grpSpPr/>
       <p:sp>
         <p:nvSpPr>
-          <p:cNvPr id="2" name="Oval 1"/>
+          <p:cNvPr id="2" name="deckgen:decor"/>
           <p:cNvSpPr/>
           <p:nvPr/>
         </p:nvSpPr>
@@ -7684,7 +7684,7 @@
       </p:sp>
       <p:sp>
         <p:nvSpPr>
-          <p:cNvPr id="3" name="Oval 2"/>
+          <p:cNvPr id="3" name="deckgen:decor"/>
           <p:cNvSpPr/>
           <p:nvPr/>
         </p:nvSpPr>
@@ -7714,7 +7714,7 @@
       </p:sp>
       <p:sp>
         <p:nvSpPr>
-          <p:cNvPr id="4" name="Oval 3"/>
+          <p:cNvPr id="4" name="deckgen:decor"/>
           <p:cNvSpPr/>
           <p:nvPr/>
         </p:nvSpPr>
@@ -7778,7 +7778,7 @@
                 <a:ea typeface="Pretendard"/>
                 <a:cs typeface="Pretendard"/>
               </a:rPr>
-              <a:t>1. s3a 커넥터</a:t>
+              <a:t>2. 라이브러리 둘</a:t>
             </a:r>
           </a:p>
         </p:txBody>
@@ -7819,7 +7819,7 @@
                 <a:ea typeface="Pretendard"/>
                 <a:cs typeface="Pretendard"/>
               </a:rPr>
-              <a:t>주소 체계 네 가지 — 바뀌는 것은 앞부분뿐</a:t>
+              <a:t>왜 둘인가 — 길과 눈, 둘 다 있어야 레이크하우스</a:t>
             </a:r>
           </a:p>
         </p:txBody>
@@ -7856,31 +7856,42 @@
       </p:sp>
       <p:sp>
         <p:nvSpPr>
-          <p:cNvPr id="8" name="Rectangle 7"/>
-          <p:cNvSpPr/>
-          <p:nvPr/>
-        </p:nvSpPr>
-        <p:spPr>
-          <a:xfrm>
-            <a:off x="1143000" y="2781300"/>
-            <a:ext cx="6362700" cy="590550"/>
-          </a:xfrm>
-          <a:prstGeom prst="rect">
-            <a:avLst/>
-          </a:prstGeom>
-          <a:solidFill>
-            <a:srgbClr val="0D2B5E"/>
-          </a:solidFill>
-          <a:ln>
-            <a:noFill/>
-          </a:ln>
-          <a:effectLst/>
-        </p:spPr>
-        <p:txBody>
-          <a:bodyPr rtlCol="0" anchor="ctr" wrap="square"/>
-          <a:lstStyle/>
-          <a:p>
-            <a:pPr algn="ctr"/>
+          <p:cNvPr id="8" name="TextBox 7"/>
+          <p:cNvSpPr txBox="1"/>
+          <p:nvPr/>
+        </p:nvSpPr>
+        <p:spPr>
+          <a:xfrm>
+            <a:off x="1143000" y="2857500"/>
+            <a:ext cx="7372350" cy="533400"/>
+          </a:xfrm>
+          <a:prstGeom prst="rect">
+            <a:avLst/>
+          </a:prstGeom>
+          <a:noFill/>
+        </p:spPr>
+        <p:txBody>
+          <a:bodyPr wrap="square" lIns="0" rIns="0" tIns="0" bIns="0" anchor="t">
+            <a:spAutoFit/>
+          </a:bodyPr>
+          <a:lstStyle/>
+          <a:p>
+            <a:pPr algn="l">
+              <a:lnSpc>
+                <a:spcPct val="110000"/>
+              </a:lnSpc>
+            </a:pPr>
+            <a:r>
+              <a:rPr sz="3150" b="1">
+                <a:solidFill>
+                  <a:srgbClr val="0D2B5E"/>
+                </a:solidFill>
+                <a:latin typeface="Pretendard"/>
+                <a:ea typeface="Pretendard"/>
+                <a:cs typeface="Pretendard"/>
+              </a:rPr>
+              <a:t>hadoop-aws — 길</a:t>
+            </a:r>
           </a:p>
         </p:txBody>
       </p:sp>
@@ -7892,199 +7903,53 @@
         </p:nvSpPr>
         <p:spPr>
           <a:xfrm>
-            <a:off x="1143000" y="2781300"/>
-            <a:ext cx="6362700" cy="590550"/>
-          </a:xfrm>
-          <a:prstGeom prst="rect">
-            <a:avLst/>
-          </a:prstGeom>
-          <a:noFill/>
-        </p:spPr>
-        <p:txBody>
-          <a:bodyPr wrap="square" lIns="0" rIns="0" tIns="0" bIns="0" anchor="ctr">
-            <a:spAutoFit/>
-          </a:bodyPr>
-          <a:lstStyle/>
-          <a:p>
-            <a:pPr algn="ctr">
-              <a:lnSpc>
-                <a:spcPct val="100000"/>
-              </a:lnSpc>
-            </a:pPr>
-            <a:r>
-              <a:rPr sz="2025" b="1">
-                <a:solidFill>
-                  <a:srgbClr val="FFFFFF"/>
-                </a:solidFill>
-                <a:latin typeface="Pretendard"/>
-                <a:ea typeface="Pretendard"/>
-                <a:cs typeface="Pretendard"/>
-              </a:rPr>
-              <a:t>주소</a:t>
-            </a:r>
-          </a:p>
-        </p:txBody>
-      </p:sp>
-      <p:sp>
-        <p:nvSpPr>
-          <p:cNvPr id="10" name="Rectangle 9"/>
-          <p:cNvSpPr/>
-          <p:nvPr/>
-        </p:nvSpPr>
-        <p:spPr>
-          <a:xfrm>
-            <a:off x="7543800" y="2781300"/>
-            <a:ext cx="9601200" cy="590550"/>
-          </a:xfrm>
-          <a:prstGeom prst="rect">
-            <a:avLst/>
-          </a:prstGeom>
-          <a:solidFill>
-            <a:srgbClr val="1E5BC6"/>
-          </a:solidFill>
-          <a:ln>
-            <a:noFill/>
-          </a:ln>
-          <a:effectLst/>
-        </p:spPr>
-        <p:txBody>
-          <a:bodyPr rtlCol="0" anchor="ctr" wrap="square"/>
-          <a:lstStyle/>
-          <a:p>
-            <a:pPr algn="ctr"/>
-          </a:p>
-        </p:txBody>
-      </p:sp>
-      <p:sp>
-        <p:nvSpPr>
-          <p:cNvPr id="11" name="TextBox 10"/>
-          <p:cNvSpPr txBox="1"/>
-          <p:nvPr/>
-        </p:nvSpPr>
-        <p:spPr>
-          <a:xfrm>
-            <a:off x="7543800" y="2781300"/>
-            <a:ext cx="9601200" cy="590550"/>
-          </a:xfrm>
-          <a:prstGeom prst="rect">
-            <a:avLst/>
-          </a:prstGeom>
-          <a:noFill/>
-        </p:spPr>
-        <p:txBody>
-          <a:bodyPr wrap="square" lIns="0" rIns="0" tIns="0" bIns="0" anchor="ctr">
-            <a:spAutoFit/>
-          </a:bodyPr>
-          <a:lstStyle/>
-          <a:p>
-            <a:pPr algn="ctr">
-              <a:lnSpc>
-                <a:spcPct val="100000"/>
-              </a:lnSpc>
-            </a:pPr>
-            <a:r>
-              <a:rPr sz="2025" b="1">
-                <a:solidFill>
-                  <a:srgbClr val="FFFFFF"/>
-                </a:solidFill>
-                <a:latin typeface="Pretendard"/>
-                <a:ea typeface="Pretendard"/>
-                <a:cs typeface="Pretendard"/>
-              </a:rPr>
-              <a:t>무엇</a:t>
-            </a:r>
-          </a:p>
-        </p:txBody>
-      </p:sp>
-      <p:sp>
-        <p:nvSpPr>
-          <p:cNvPr id="12" name="Rounded Rectangle 11"/>
-          <p:cNvSpPr/>
-          <p:nvPr/>
-        </p:nvSpPr>
-        <p:spPr>
-          <a:xfrm>
-            <a:off x="1143000" y="3448050"/>
-            <a:ext cx="6362700" cy="647700"/>
+            <a:off x="1143000" y="3467100"/>
+            <a:ext cx="7372350" cy="876300"/>
+          </a:xfrm>
+          <a:prstGeom prst="rect">
+            <a:avLst/>
+          </a:prstGeom>
+          <a:noFill/>
+        </p:spPr>
+        <p:txBody>
+          <a:bodyPr wrap="square" lIns="0" rIns="0" tIns="0" bIns="0" anchor="t">
+            <a:spAutoFit/>
+          </a:bodyPr>
+          <a:lstStyle/>
+          <a:p>
+            <a:pPr algn="l">
+              <a:lnSpc>
+                <a:spcPct val="146000"/>
+              </a:lnSpc>
+            </a:pPr>
+            <a:r>
+              <a:rPr sz="2250" b="0">
+                <a:solidFill>
+                  <a:srgbClr val="3D3D3D"/>
+                </a:solidFill>
+                <a:latin typeface="Pretendard"/>
+                <a:ea typeface="Pretendard"/>
+                <a:cs typeface="Pretendard"/>
+              </a:rPr>
+              <a:t>s3a 어댑터 본체, 스토리지에 닿는 길</a:t>
+            </a:r>
+          </a:p>
+        </p:txBody>
+      </p:sp>
+      <p:sp>
+        <p:nvSpPr>
+          <p:cNvPr id="10" name="Rounded Rectangle 9"/>
+          <p:cNvSpPr/>
+          <p:nvPr/>
+        </p:nvSpPr>
+        <p:spPr>
+          <a:xfrm>
+            <a:off x="1143000" y="4610100"/>
+            <a:ext cx="7372350" cy="2857500"/>
           </a:xfrm>
           <a:prstGeom prst="roundRect">
             <a:avLst>
-              <a:gd name="adj" fmla="val 5882"/>
-            </a:avLst>
-          </a:prstGeom>
-          <a:solidFill>
-            <a:srgbClr val="EDF3FD"/>
-          </a:solidFill>
-          <a:ln w="9525">
-            <a:solidFill>
-              <a:srgbClr val="BFD3F5"/>
-            </a:solidFill>
-          </a:ln>
-          <a:effectLst/>
-        </p:spPr>
-        <p:txBody>
-          <a:bodyPr rtlCol="0" anchor="ctr" wrap="square"/>
-          <a:lstStyle/>
-          <a:p>
-            <a:pPr algn="ctr"/>
-          </a:p>
-        </p:txBody>
-      </p:sp>
-      <p:sp>
-        <p:nvSpPr>
-          <p:cNvPr id="13" name="TextBox 12"/>
-          <p:cNvSpPr txBox="1"/>
-          <p:nvPr/>
-        </p:nvSpPr>
-        <p:spPr>
-          <a:xfrm>
-            <a:off x="1238250" y="3448050"/>
-            <a:ext cx="6172200" cy="647700"/>
-          </a:xfrm>
-          <a:prstGeom prst="rect">
-            <a:avLst/>
-          </a:prstGeom>
-          <a:noFill/>
-        </p:spPr>
-        <p:txBody>
-          <a:bodyPr wrap="square" lIns="0" rIns="0" tIns="0" bIns="0" anchor="ctr">
-            <a:spAutoFit/>
-          </a:bodyPr>
-          <a:lstStyle/>
-          <a:p>
-            <a:pPr algn="l">
-              <a:lnSpc>
-                <a:spcPct val="115000"/>
-              </a:lnSpc>
-            </a:pPr>
-            <a:r>
-              <a:rPr sz="1875" b="1">
-                <a:solidFill>
-                  <a:srgbClr val="0D2B5E"/>
-                </a:solidFill>
-                <a:latin typeface="Pretendard"/>
-                <a:ea typeface="Pretendard"/>
-                <a:cs typeface="Pretendard"/>
-              </a:rPr>
-              <a:t>file:///path</a:t>
-            </a:r>
-          </a:p>
-        </p:txBody>
-      </p:sp>
-      <p:sp>
-        <p:nvSpPr>
-          <p:cNvPr id="14" name="Rounded Rectangle 13"/>
-          <p:cNvSpPr/>
-          <p:nvPr/>
-        </p:nvSpPr>
-        <p:spPr>
-          <a:xfrm>
-            <a:off x="7543800" y="3448050"/>
-            <a:ext cx="9601200" cy="647700"/>
-          </a:xfrm>
-          <a:prstGeom prst="roundRect">
-            <a:avLst>
-              <a:gd name="adj" fmla="val 5882"/>
+              <a:gd name="adj" fmla="val 1666"/>
             </a:avLst>
           </a:prstGeom>
           <a:solidFill>
@@ -8107,14 +7972,44 @@
       </p:sp>
       <p:sp>
         <p:nvSpPr>
-          <p:cNvPr id="15" name="TextBox 14"/>
-          <p:cNvSpPr txBox="1"/>
-          <p:nvPr/>
-        </p:nvSpPr>
-        <p:spPr>
-          <a:xfrm>
-            <a:off x="7639050" y="3448050"/>
-            <a:ext cx="9410700" cy="647700"/>
+          <p:cNvPr id="11" name="Oval 10"/>
+          <p:cNvSpPr/>
+          <p:nvPr/>
+        </p:nvSpPr>
+        <p:spPr>
+          <a:xfrm>
+            <a:off x="1447800" y="5016817"/>
+            <a:ext cx="97155" cy="97155"/>
+          </a:xfrm>
+          <a:prstGeom prst="ellipse">
+            <a:avLst/>
+          </a:prstGeom>
+          <a:solidFill>
+            <a:srgbClr val="1E5BC6"/>
+          </a:solidFill>
+          <a:ln>
+            <a:noFill/>
+          </a:ln>
+          <a:effectLst/>
+        </p:spPr>
+        <p:txBody>
+          <a:bodyPr rtlCol="0" anchor="ctr" wrap="square"/>
+          <a:lstStyle/>
+          <a:p>
+            <a:pPr algn="ctr"/>
+          </a:p>
+        </p:txBody>
+      </p:sp>
+      <p:sp>
+        <p:nvSpPr>
+          <p:cNvPr id="12" name="TextBox 11"/>
+          <p:cNvSpPr txBox="1"/>
+          <p:nvPr/>
+        </p:nvSpPr>
+        <p:spPr>
+          <a:xfrm>
+            <a:off x="1633538" y="4838700"/>
+            <a:ext cx="6634162" cy="453390"/>
           </a:xfrm>
           <a:prstGeom prst="rect">
             <a:avLst/>
@@ -8127,13 +8022,13 @@
           </a:bodyPr>
           <a:lstStyle/>
           <a:p>
-            <a:pPr algn="ctr">
-              <a:lnSpc>
-                <a:spcPct val="115000"/>
-              </a:lnSpc>
-            </a:pPr>
-            <a:r>
-              <a:rPr sz="1875" b="0">
+            <a:pPr algn="l">
+              <a:lnSpc>
+                <a:spcPct val="120000"/>
+              </a:lnSpc>
+            </a:pPr>
+            <a:r>
+              <a:rPr sz="1575" b="0">
                 <a:solidFill>
                   <a:srgbClr val="3D3D3D"/>
                 </a:solidFill>
@@ -8141,100 +8036,249 @@
                 <a:ea typeface="Pretendard"/>
                 <a:cs typeface="Pretendard"/>
               </a:rPr>
-              <a:t>로컬 디스크</a:t>
-            </a:r>
-          </a:p>
-        </p:txBody>
-      </p:sp>
-      <p:sp>
-        <p:nvSpPr>
-          <p:cNvPr id="16" name="Rounded Rectangle 15"/>
-          <p:cNvSpPr/>
-          <p:nvPr/>
-        </p:nvSpPr>
-        <p:spPr>
-          <a:xfrm>
-            <a:off x="1143000" y="4171950"/>
-            <a:ext cx="6362700" cy="647700"/>
+              <a:t>s3a:// 주소로 읽고 쓰기</a:t>
+            </a:r>
+          </a:p>
+        </p:txBody>
+      </p:sp>
+      <p:sp>
+        <p:nvSpPr>
+          <p:cNvPr id="13" name="Oval 12"/>
+          <p:cNvSpPr/>
+          <p:nvPr/>
+        </p:nvSpPr>
+        <p:spPr>
+          <a:xfrm>
+            <a:off x="1447800" y="5527358"/>
+            <a:ext cx="97155" cy="97155"/>
+          </a:xfrm>
+          <a:prstGeom prst="ellipse">
+            <a:avLst/>
+          </a:prstGeom>
+          <a:solidFill>
+            <a:srgbClr val="1E5BC6"/>
+          </a:solidFill>
+          <a:ln>
+            <a:noFill/>
+          </a:ln>
+          <a:effectLst/>
+        </p:spPr>
+        <p:txBody>
+          <a:bodyPr rtlCol="0" anchor="ctr" wrap="square"/>
+          <a:lstStyle/>
+          <a:p>
+            <a:pPr algn="ctr"/>
+          </a:p>
+        </p:txBody>
+      </p:sp>
+      <p:sp>
+        <p:nvSpPr>
+          <p:cNvPr id="14" name="TextBox 13"/>
+          <p:cNvSpPr txBox="1"/>
+          <p:nvPr/>
+        </p:nvSpPr>
+        <p:spPr>
+          <a:xfrm>
+            <a:off x="1633538" y="5349240"/>
+            <a:ext cx="6634162" cy="453390"/>
+          </a:xfrm>
+          <a:prstGeom prst="rect">
+            <a:avLst/>
+          </a:prstGeom>
+          <a:noFill/>
+        </p:spPr>
+        <p:txBody>
+          <a:bodyPr wrap="square" lIns="0" rIns="0" tIns="0" bIns="0" anchor="ctr">
+            <a:spAutoFit/>
+          </a:bodyPr>
+          <a:lstStyle/>
+          <a:p>
+            <a:pPr algn="l">
+              <a:lnSpc>
+                <a:spcPct val="120000"/>
+              </a:lnSpc>
+            </a:pPr>
+            <a:r>
+              <a:rPr sz="1575" b="0">
+                <a:solidFill>
+                  <a:srgbClr val="3D3D3D"/>
+                </a:solidFill>
+                <a:latin typeface="Pretendard"/>
+                <a:ea typeface="Pretendard"/>
+                <a:cs typeface="Pretendard"/>
+              </a:rPr>
+              <a:t>없으면 ClassNotFoundException</a:t>
+            </a:r>
+          </a:p>
+        </p:txBody>
+      </p:sp>
+      <p:sp>
+        <p:nvSpPr>
+          <p:cNvPr id="15" name="Oval 14"/>
+          <p:cNvSpPr/>
+          <p:nvPr/>
+        </p:nvSpPr>
+        <p:spPr>
+          <a:xfrm>
+            <a:off x="1447800" y="6037898"/>
+            <a:ext cx="97155" cy="97155"/>
+          </a:xfrm>
+          <a:prstGeom prst="ellipse">
+            <a:avLst/>
+          </a:prstGeom>
+          <a:solidFill>
+            <a:srgbClr val="1E5BC6"/>
+          </a:solidFill>
+          <a:ln>
+            <a:noFill/>
+          </a:ln>
+          <a:effectLst/>
+        </p:spPr>
+        <p:txBody>
+          <a:bodyPr rtlCol="0" anchor="ctr" wrap="square"/>
+          <a:lstStyle/>
+          <a:p>
+            <a:pPr algn="ctr"/>
+          </a:p>
+        </p:txBody>
+      </p:sp>
+      <p:sp>
+        <p:nvSpPr>
+          <p:cNvPr id="16" name="TextBox 15"/>
+          <p:cNvSpPr txBox="1"/>
+          <p:nvPr/>
+        </p:nvSpPr>
+        <p:spPr>
+          <a:xfrm>
+            <a:off x="1633538" y="5859780"/>
+            <a:ext cx="6634162" cy="453390"/>
+          </a:xfrm>
+          <a:prstGeom prst="rect">
+            <a:avLst/>
+          </a:prstGeom>
+          <a:noFill/>
+        </p:spPr>
+        <p:txBody>
+          <a:bodyPr wrap="square" lIns="0" rIns="0" tIns="0" bIns="0" anchor="ctr">
+            <a:spAutoFit/>
+          </a:bodyPr>
+          <a:lstStyle/>
+          <a:p>
+            <a:pPr algn="l">
+              <a:lnSpc>
+                <a:spcPct val="120000"/>
+              </a:lnSpc>
+            </a:pPr>
+            <a:r>
+              <a:rPr sz="1575" b="0">
+                <a:solidFill>
+                  <a:srgbClr val="3D3D3D"/>
+                </a:solidFill>
+                <a:latin typeface="Pretendard"/>
+                <a:ea typeface="Pretendard"/>
+                <a:cs typeface="Pretendard"/>
+              </a:rPr>
+              <a:t>S3AFileSystem 을 못 찾는다</a:t>
+            </a:r>
+          </a:p>
+        </p:txBody>
+      </p:sp>
+      <p:sp>
+        <p:nvSpPr>
+          <p:cNvPr id="17" name="TextBox 16"/>
+          <p:cNvSpPr txBox="1"/>
+          <p:nvPr/>
+        </p:nvSpPr>
+        <p:spPr>
+          <a:xfrm>
+            <a:off x="9772650" y="2857500"/>
+            <a:ext cx="7372350" cy="533400"/>
+          </a:xfrm>
+          <a:prstGeom prst="rect">
+            <a:avLst/>
+          </a:prstGeom>
+          <a:noFill/>
+        </p:spPr>
+        <p:txBody>
+          <a:bodyPr wrap="square" lIns="0" rIns="0" tIns="0" bIns="0" anchor="t">
+            <a:spAutoFit/>
+          </a:bodyPr>
+          <a:lstStyle/>
+          <a:p>
+            <a:pPr algn="l">
+              <a:lnSpc>
+                <a:spcPct val="110000"/>
+              </a:lnSpc>
+            </a:pPr>
+            <a:r>
+              <a:rPr sz="3150" b="1">
+                <a:solidFill>
+                  <a:srgbClr val="0D2B5E"/>
+                </a:solidFill>
+                <a:latin typeface="Pretendard"/>
+                <a:ea typeface="Pretendard"/>
+                <a:cs typeface="Pretendard"/>
+              </a:rPr>
+              <a:t>iceberg-spark-runtime — 눈</a:t>
+            </a:r>
+          </a:p>
+        </p:txBody>
+      </p:sp>
+      <p:sp>
+        <p:nvSpPr>
+          <p:cNvPr id="18" name="TextBox 17"/>
+          <p:cNvSpPr txBox="1"/>
+          <p:nvPr/>
+        </p:nvSpPr>
+        <p:spPr>
+          <a:xfrm>
+            <a:off x="9772650" y="3467100"/>
+            <a:ext cx="7372350" cy="876300"/>
+          </a:xfrm>
+          <a:prstGeom prst="rect">
+            <a:avLst/>
+          </a:prstGeom>
+          <a:noFill/>
+        </p:spPr>
+        <p:txBody>
+          <a:bodyPr wrap="square" lIns="0" rIns="0" tIns="0" bIns="0" anchor="t">
+            <a:spAutoFit/>
+          </a:bodyPr>
+          <a:lstStyle/>
+          <a:p>
+            <a:pPr algn="l">
+              <a:lnSpc>
+                <a:spcPct val="146000"/>
+              </a:lnSpc>
+            </a:pPr>
+            <a:r>
+              <a:rPr sz="2250" b="0">
+                <a:solidFill>
+                  <a:srgbClr val="3D3D3D"/>
+                </a:solidFill>
+                <a:latin typeface="Pretendard"/>
+                <a:ea typeface="Pretendard"/>
+                <a:cs typeface="Pretendard"/>
+              </a:rPr>
+              <a:t>파일 무더기를 「테이블」로 읽는 번역기</a:t>
+            </a:r>
+          </a:p>
+        </p:txBody>
+      </p:sp>
+      <p:sp>
+        <p:nvSpPr>
+          <p:cNvPr id="19" name="Rounded Rectangle 18"/>
+          <p:cNvSpPr/>
+          <p:nvPr/>
+        </p:nvSpPr>
+        <p:spPr>
+          <a:xfrm>
+            <a:off x="9772650" y="4610100"/>
+            <a:ext cx="7372350" cy="2857500"/>
           </a:xfrm>
           <a:prstGeom prst="roundRect">
             <a:avLst>
-              <a:gd name="adj" fmla="val 5882"/>
-            </a:avLst>
-          </a:prstGeom>
-          <a:solidFill>
-            <a:srgbClr val="EDF3FD"/>
-          </a:solidFill>
-          <a:ln w="9525">
-            <a:solidFill>
-              <a:srgbClr val="BFD3F5"/>
-            </a:solidFill>
-          </a:ln>
-          <a:effectLst/>
-        </p:spPr>
-        <p:txBody>
-          <a:bodyPr rtlCol="0" anchor="ctr" wrap="square"/>
-          <a:lstStyle/>
-          <a:p>
-            <a:pPr algn="ctr"/>
-          </a:p>
-        </p:txBody>
-      </p:sp>
-      <p:sp>
-        <p:nvSpPr>
-          <p:cNvPr id="17" name="TextBox 16"/>
-          <p:cNvSpPr txBox="1"/>
-          <p:nvPr/>
-        </p:nvSpPr>
-        <p:spPr>
-          <a:xfrm>
-            <a:off x="1238250" y="4171950"/>
-            <a:ext cx="6172200" cy="647700"/>
-          </a:xfrm>
-          <a:prstGeom prst="rect">
-            <a:avLst/>
-          </a:prstGeom>
-          <a:noFill/>
-        </p:spPr>
-        <p:txBody>
-          <a:bodyPr wrap="square" lIns="0" rIns="0" tIns="0" bIns="0" anchor="ctr">
-            <a:spAutoFit/>
-          </a:bodyPr>
-          <a:lstStyle/>
-          <a:p>
-            <a:pPr algn="l">
-              <a:lnSpc>
-                <a:spcPct val="115000"/>
-              </a:lnSpc>
-            </a:pPr>
-            <a:r>
-              <a:rPr sz="1875" b="1">
-                <a:solidFill>
-                  <a:srgbClr val="0D2B5E"/>
-                </a:solidFill>
-                <a:latin typeface="Pretendard"/>
-                <a:ea typeface="Pretendard"/>
-                <a:cs typeface="Pretendard"/>
-              </a:rPr>
-              <a:t>hdfs://…</a:t>
-            </a:r>
-          </a:p>
-        </p:txBody>
-      </p:sp>
-      <p:sp>
-        <p:nvSpPr>
-          <p:cNvPr id="18" name="Rounded Rectangle 17"/>
-          <p:cNvSpPr/>
-          <p:nvPr/>
-        </p:nvSpPr>
-        <p:spPr>
-          <a:xfrm>
-            <a:off x="7543800" y="4171950"/>
-            <a:ext cx="9601200" cy="647700"/>
-          </a:xfrm>
-          <a:prstGeom prst="roundRect">
-            <a:avLst>
-              <a:gd name="adj" fmla="val 5882"/>
+              <a:gd name="adj" fmla="val 1666"/>
             </a:avLst>
           </a:prstGeom>
           <a:solidFill>
@@ -8257,14 +8301,44 @@
       </p:sp>
       <p:sp>
         <p:nvSpPr>
-          <p:cNvPr id="19" name="TextBox 18"/>
-          <p:cNvSpPr txBox="1"/>
-          <p:nvPr/>
-        </p:nvSpPr>
-        <p:spPr>
-          <a:xfrm>
-            <a:off x="7639050" y="4171950"/>
-            <a:ext cx="9410700" cy="647700"/>
+          <p:cNvPr id="20" name="Oval 19"/>
+          <p:cNvSpPr/>
+          <p:nvPr/>
+        </p:nvSpPr>
+        <p:spPr>
+          <a:xfrm>
+            <a:off x="10077450" y="5016817"/>
+            <a:ext cx="97155" cy="97155"/>
+          </a:xfrm>
+          <a:prstGeom prst="ellipse">
+            <a:avLst/>
+          </a:prstGeom>
+          <a:solidFill>
+            <a:srgbClr val="1E5BC6"/>
+          </a:solidFill>
+          <a:ln>
+            <a:noFill/>
+          </a:ln>
+          <a:effectLst/>
+        </p:spPr>
+        <p:txBody>
+          <a:bodyPr rtlCol="0" anchor="ctr" wrap="square"/>
+          <a:lstStyle/>
+          <a:p>
+            <a:pPr algn="ctr"/>
+          </a:p>
+        </p:txBody>
+      </p:sp>
+      <p:sp>
+        <p:nvSpPr>
+          <p:cNvPr id="21" name="TextBox 20"/>
+          <p:cNvSpPr txBox="1"/>
+          <p:nvPr/>
+        </p:nvSpPr>
+        <p:spPr>
+          <a:xfrm>
+            <a:off x="10263188" y="4838700"/>
+            <a:ext cx="6634162" cy="453390"/>
           </a:xfrm>
           <a:prstGeom prst="rect">
             <a:avLst/>
@@ -8277,369 +8351,241 @@
           </a:bodyPr>
           <a:lstStyle/>
           <a:p>
+            <a:pPr algn="l">
+              <a:lnSpc>
+                <a:spcPct val="120000"/>
+              </a:lnSpc>
+            </a:pPr>
+            <a:r>
+              <a:rPr sz="1575" b="0">
+                <a:solidFill>
+                  <a:srgbClr val="3D3D3D"/>
+                </a:solidFill>
+                <a:latin typeface="Pretendard"/>
+                <a:ea typeface="Pretendard"/>
+                <a:cs typeface="Pretendard"/>
+              </a:rPr>
+              <a:t>Iceberg 테이블 읽고 쓰기 · 메타테이블</a:t>
+            </a:r>
+          </a:p>
+        </p:txBody>
+      </p:sp>
+      <p:sp>
+        <p:nvSpPr>
+          <p:cNvPr id="22" name="Oval 21"/>
+          <p:cNvSpPr/>
+          <p:nvPr/>
+        </p:nvSpPr>
+        <p:spPr>
+          <a:xfrm>
+            <a:off x="10077450" y="5527358"/>
+            <a:ext cx="97155" cy="97155"/>
+          </a:xfrm>
+          <a:prstGeom prst="ellipse">
+            <a:avLst/>
+          </a:prstGeom>
+          <a:solidFill>
+            <a:srgbClr val="1E5BC6"/>
+          </a:solidFill>
+          <a:ln>
+            <a:noFill/>
+          </a:ln>
+          <a:effectLst/>
+        </p:spPr>
+        <p:txBody>
+          <a:bodyPr rtlCol="0" anchor="ctr" wrap="square"/>
+          <a:lstStyle/>
+          <a:p>
+            <a:pPr algn="ctr"/>
+          </a:p>
+        </p:txBody>
+      </p:sp>
+      <p:sp>
+        <p:nvSpPr>
+          <p:cNvPr id="23" name="TextBox 22"/>
+          <p:cNvSpPr txBox="1"/>
+          <p:nvPr/>
+        </p:nvSpPr>
+        <p:spPr>
+          <a:xfrm>
+            <a:off x="10263188" y="5349240"/>
+            <a:ext cx="6634162" cy="453390"/>
+          </a:xfrm>
+          <a:prstGeom prst="rect">
+            <a:avLst/>
+          </a:prstGeom>
+          <a:noFill/>
+        </p:spPr>
+        <p:txBody>
+          <a:bodyPr wrap="square" lIns="0" rIns="0" tIns="0" bIns="0" anchor="ctr">
+            <a:spAutoFit/>
+          </a:bodyPr>
+          <a:lstStyle/>
+          <a:p>
+            <a:pPr algn="l">
+              <a:lnSpc>
+                <a:spcPct val="120000"/>
+              </a:lnSpc>
+            </a:pPr>
+            <a:r>
+              <a:rPr sz="1575" b="0">
+                <a:solidFill>
+                  <a:srgbClr val="3D3D3D"/>
+                </a:solidFill>
+                <a:latin typeface="Pretendard"/>
+                <a:ea typeface="Pretendard"/>
+                <a:cs typeface="Pretendard"/>
+              </a:rPr>
+              <a:t>없으면 USING iceberg 를 모른다</a:t>
+            </a:r>
+          </a:p>
+        </p:txBody>
+      </p:sp>
+      <p:sp>
+        <p:nvSpPr>
+          <p:cNvPr id="24" name="Oval 23"/>
+          <p:cNvSpPr/>
+          <p:nvPr/>
+        </p:nvSpPr>
+        <p:spPr>
+          <a:xfrm>
+            <a:off x="10077450" y="6037898"/>
+            <a:ext cx="97155" cy="97155"/>
+          </a:xfrm>
+          <a:prstGeom prst="ellipse">
+            <a:avLst/>
+          </a:prstGeom>
+          <a:solidFill>
+            <a:srgbClr val="1E5BC6"/>
+          </a:solidFill>
+          <a:ln>
+            <a:noFill/>
+          </a:ln>
+          <a:effectLst/>
+        </p:spPr>
+        <p:txBody>
+          <a:bodyPr rtlCol="0" anchor="ctr" wrap="square"/>
+          <a:lstStyle/>
+          <a:p>
+            <a:pPr algn="ctr"/>
+          </a:p>
+        </p:txBody>
+      </p:sp>
+      <p:sp>
+        <p:nvSpPr>
+          <p:cNvPr id="25" name="TextBox 24"/>
+          <p:cNvSpPr txBox="1"/>
+          <p:nvPr/>
+        </p:nvSpPr>
+        <p:spPr>
+          <a:xfrm>
+            <a:off x="10263188" y="5859780"/>
+            <a:ext cx="6634162" cy="453390"/>
+          </a:xfrm>
+          <a:prstGeom prst="rect">
+            <a:avLst/>
+          </a:prstGeom>
+          <a:noFill/>
+        </p:spPr>
+        <p:txBody>
+          <a:bodyPr wrap="square" lIns="0" rIns="0" tIns="0" bIns="0" anchor="ctr">
+            <a:spAutoFit/>
+          </a:bodyPr>
+          <a:lstStyle/>
+          <a:p>
+            <a:pPr algn="l">
+              <a:lnSpc>
+                <a:spcPct val="120000"/>
+              </a:lnSpc>
+            </a:pPr>
+            <a:r>
+              <a:rPr sz="1575" b="0">
+                <a:solidFill>
+                  <a:srgbClr val="3D3D3D"/>
+                </a:solidFill>
+                <a:latin typeface="Pretendard"/>
+                <a:ea typeface="Pretendard"/>
+                <a:cs typeface="Pretendard"/>
+              </a:rPr>
+              <a:t>버전이 어긋나면 클래스·메서드 못 찾음</a:t>
+            </a:r>
+          </a:p>
+        </p:txBody>
+      </p:sp>
+      <p:sp>
+        <p:nvSpPr>
+          <p:cNvPr id="26" name="Oval 25"/>
+          <p:cNvSpPr/>
+          <p:nvPr/>
+        </p:nvSpPr>
+        <p:spPr>
+          <a:xfrm>
+            <a:off x="8686800" y="3771900"/>
+            <a:ext cx="914400" cy="914400"/>
+          </a:xfrm>
+          <a:prstGeom prst="ellipse">
+            <a:avLst/>
+          </a:prstGeom>
+          <a:solidFill>
+            <a:srgbClr val="0D2B5E"/>
+          </a:solidFill>
+          <a:ln>
+            <a:noFill/>
+          </a:ln>
+          <a:effectLst/>
+        </p:spPr>
+        <p:txBody>
+          <a:bodyPr rtlCol="0" anchor="ctr" wrap="square"/>
+          <a:lstStyle/>
+          <a:p>
+            <a:pPr algn="ctr"/>
+          </a:p>
+        </p:txBody>
+      </p:sp>
+      <p:sp>
+        <p:nvSpPr>
+          <p:cNvPr id="27" name="TextBox 26"/>
+          <p:cNvSpPr txBox="1"/>
+          <p:nvPr/>
+        </p:nvSpPr>
+        <p:spPr>
+          <a:xfrm>
+            <a:off x="8686800" y="4057650"/>
+            <a:ext cx="914400" cy="381000"/>
+          </a:xfrm>
+          <a:prstGeom prst="rect">
+            <a:avLst/>
+          </a:prstGeom>
+          <a:noFill/>
+        </p:spPr>
+        <p:txBody>
+          <a:bodyPr wrap="square" lIns="0" rIns="0" tIns="0" bIns="0" anchor="t">
+            <a:spAutoFit/>
+          </a:bodyPr>
+          <a:lstStyle/>
+          <a:p>
             <a:pPr algn="ctr">
               <a:lnSpc>
-                <a:spcPct val="115000"/>
-              </a:lnSpc>
-            </a:pPr>
-            <a:r>
-              <a:rPr sz="1875" b="0">
-                <a:solidFill>
-                  <a:srgbClr val="3D3D3D"/>
-                </a:solidFill>
-                <a:latin typeface="Pretendard"/>
-                <a:ea typeface="Pretendard"/>
-                <a:cs typeface="Pretendard"/>
-              </a:rPr>
-              <a:t>HDFS</a:t>
-            </a:r>
-          </a:p>
-        </p:txBody>
-      </p:sp>
-      <p:sp>
-        <p:nvSpPr>
-          <p:cNvPr id="20" name="Rounded Rectangle 19"/>
-          <p:cNvSpPr/>
-          <p:nvPr/>
-        </p:nvSpPr>
-        <p:spPr>
-          <a:xfrm>
-            <a:off x="1143000" y="4895850"/>
-            <a:ext cx="6362700" cy="647700"/>
-          </a:xfrm>
-          <a:prstGeom prst="roundRect">
-            <a:avLst>
-              <a:gd name="adj" fmla="val 5882"/>
-            </a:avLst>
-          </a:prstGeom>
-          <a:solidFill>
-            <a:srgbClr val="EDF3FD"/>
-          </a:solidFill>
-          <a:ln w="9525">
-            <a:solidFill>
-              <a:srgbClr val="BFD3F5"/>
-            </a:solidFill>
-          </a:ln>
-          <a:effectLst/>
-        </p:spPr>
-        <p:txBody>
-          <a:bodyPr rtlCol="0" anchor="ctr" wrap="square"/>
-          <a:lstStyle/>
-          <a:p>
-            <a:pPr algn="ctr"/>
-          </a:p>
-        </p:txBody>
-      </p:sp>
-      <p:sp>
-        <p:nvSpPr>
-          <p:cNvPr id="21" name="TextBox 20"/>
-          <p:cNvSpPr txBox="1"/>
-          <p:nvPr/>
-        </p:nvSpPr>
-        <p:spPr>
-          <a:xfrm>
-            <a:off x="1238250" y="4895850"/>
-            <a:ext cx="6172200" cy="647700"/>
-          </a:xfrm>
-          <a:prstGeom prst="rect">
-            <a:avLst/>
-          </a:prstGeom>
-          <a:noFill/>
-        </p:spPr>
-        <p:txBody>
-          <a:bodyPr wrap="square" lIns="0" rIns="0" tIns="0" bIns="0" anchor="ctr">
-            <a:spAutoFit/>
-          </a:bodyPr>
-          <a:lstStyle/>
-          <a:p>
-            <a:pPr algn="l">
-              <a:lnSpc>
-                <a:spcPct val="115000"/>
-              </a:lnSpc>
-            </a:pPr>
-            <a:r>
-              <a:rPr sz="1875" b="1">
-                <a:solidFill>
-                  <a:srgbClr val="0D2B5E"/>
-                </a:solidFill>
-                <a:latin typeface="Pretendard"/>
-                <a:ea typeface="Pretendard"/>
-                <a:cs typeface="Pretendard"/>
-              </a:rPr>
-              <a:t>s3a://버킷/키</a:t>
-            </a:r>
-          </a:p>
-        </p:txBody>
-      </p:sp>
-      <p:sp>
-        <p:nvSpPr>
-          <p:cNvPr id="22" name="Rounded Rectangle 21"/>
-          <p:cNvSpPr/>
-          <p:nvPr/>
-        </p:nvSpPr>
-        <p:spPr>
-          <a:xfrm>
-            <a:off x="7543800" y="4895850"/>
-            <a:ext cx="9601200" cy="647700"/>
-          </a:xfrm>
-          <a:prstGeom prst="roundRect">
-            <a:avLst>
-              <a:gd name="adj" fmla="val 5882"/>
-            </a:avLst>
-          </a:prstGeom>
-          <a:solidFill>
-            <a:srgbClr val="FAFBFD"/>
-          </a:solidFill>
-          <a:ln w="9525">
-            <a:solidFill>
-              <a:srgbClr val="DCE1E8"/>
-            </a:solidFill>
-          </a:ln>
-          <a:effectLst/>
-        </p:spPr>
-        <p:txBody>
-          <a:bodyPr rtlCol="0" anchor="ctr" wrap="square"/>
-          <a:lstStyle/>
-          <a:p>
-            <a:pPr algn="ctr"/>
-          </a:p>
-        </p:txBody>
-      </p:sp>
-      <p:sp>
-        <p:nvSpPr>
-          <p:cNvPr id="23" name="TextBox 22"/>
-          <p:cNvSpPr txBox="1"/>
-          <p:nvPr/>
-        </p:nvSpPr>
-        <p:spPr>
-          <a:xfrm>
-            <a:off x="7639050" y="4895850"/>
-            <a:ext cx="9410700" cy="647700"/>
-          </a:xfrm>
-          <a:prstGeom prst="rect">
-            <a:avLst/>
-          </a:prstGeom>
-          <a:noFill/>
-        </p:spPr>
-        <p:txBody>
-          <a:bodyPr wrap="square" lIns="0" rIns="0" tIns="0" bIns="0" anchor="ctr">
-            <a:spAutoFit/>
-          </a:bodyPr>
-          <a:lstStyle/>
-          <a:p>
-            <a:pPr algn="ctr">
-              <a:lnSpc>
-                <a:spcPct val="115000"/>
-              </a:lnSpc>
-            </a:pPr>
-            <a:r>
-              <a:rPr sz="1875" b="0">
-                <a:solidFill>
-                  <a:srgbClr val="3D3D3D"/>
-                </a:solidFill>
-                <a:latin typeface="Pretendard"/>
-                <a:ea typeface="Pretendard"/>
-                <a:cs typeface="Pretendard"/>
-              </a:rPr>
-              <a:t>S3 호환 스토리지 (오늘)</a:t>
-            </a:r>
-          </a:p>
-        </p:txBody>
-      </p:sp>
-      <p:sp>
-        <p:nvSpPr>
-          <p:cNvPr id="24" name="Rounded Rectangle 23"/>
-          <p:cNvSpPr/>
-          <p:nvPr/>
-        </p:nvSpPr>
-        <p:spPr>
-          <a:xfrm>
-            <a:off x="1143000" y="5619750"/>
-            <a:ext cx="6362700" cy="647700"/>
-          </a:xfrm>
-          <a:prstGeom prst="roundRect">
-            <a:avLst>
-              <a:gd name="adj" fmla="val 5882"/>
-            </a:avLst>
-          </a:prstGeom>
-          <a:solidFill>
-            <a:srgbClr val="EDF3FD"/>
-          </a:solidFill>
-          <a:ln w="9525">
-            <a:solidFill>
-              <a:srgbClr val="BFD3F5"/>
-            </a:solidFill>
-          </a:ln>
-          <a:effectLst/>
-        </p:spPr>
-        <p:txBody>
-          <a:bodyPr rtlCol="0" anchor="ctr" wrap="square"/>
-          <a:lstStyle/>
-          <a:p>
-            <a:pPr algn="ctr"/>
-          </a:p>
-        </p:txBody>
-      </p:sp>
-      <p:sp>
-        <p:nvSpPr>
-          <p:cNvPr id="25" name="TextBox 24"/>
-          <p:cNvSpPr txBox="1"/>
-          <p:nvPr/>
-        </p:nvSpPr>
-        <p:spPr>
-          <a:xfrm>
-            <a:off x="1238250" y="5619750"/>
-            <a:ext cx="6172200" cy="647700"/>
-          </a:xfrm>
-          <a:prstGeom prst="rect">
-            <a:avLst/>
-          </a:prstGeom>
-          <a:noFill/>
-        </p:spPr>
-        <p:txBody>
-          <a:bodyPr wrap="square" lIns="0" rIns="0" tIns="0" bIns="0" anchor="ctr">
-            <a:spAutoFit/>
-          </a:bodyPr>
-          <a:lstStyle/>
-          <a:p>
-            <a:pPr algn="l">
-              <a:lnSpc>
-                <a:spcPct val="115000"/>
-              </a:lnSpc>
-            </a:pPr>
-            <a:r>
-              <a:rPr sz="1875" b="1">
-                <a:solidFill>
-                  <a:srgbClr val="0D2B5E"/>
-                </a:solidFill>
-                <a:latin typeface="Pretendard"/>
-                <a:ea typeface="Pretendard"/>
-                <a:cs typeface="Pretendard"/>
-              </a:rPr>
-              <a:t>gs://…</a:t>
-            </a:r>
-          </a:p>
-        </p:txBody>
-      </p:sp>
-      <p:sp>
-        <p:nvSpPr>
-          <p:cNvPr id="26" name="Rounded Rectangle 25"/>
-          <p:cNvSpPr/>
-          <p:nvPr/>
-        </p:nvSpPr>
-        <p:spPr>
-          <a:xfrm>
-            <a:off x="7543800" y="5619750"/>
-            <a:ext cx="9601200" cy="647700"/>
-          </a:xfrm>
-          <a:prstGeom prst="roundRect">
-            <a:avLst>
-              <a:gd name="adj" fmla="val 5882"/>
-            </a:avLst>
-          </a:prstGeom>
-          <a:solidFill>
-            <a:srgbClr val="FAFBFD"/>
-          </a:solidFill>
-          <a:ln w="9525">
-            <a:solidFill>
-              <a:srgbClr val="DCE1E8"/>
-            </a:solidFill>
-          </a:ln>
-          <a:effectLst/>
-        </p:spPr>
-        <p:txBody>
-          <a:bodyPr rtlCol="0" anchor="ctr" wrap="square"/>
-          <a:lstStyle/>
-          <a:p>
-            <a:pPr algn="ctr"/>
-          </a:p>
-        </p:txBody>
-      </p:sp>
-      <p:sp>
-        <p:nvSpPr>
-          <p:cNvPr id="27" name="TextBox 26"/>
-          <p:cNvSpPr txBox="1"/>
-          <p:nvPr/>
-        </p:nvSpPr>
-        <p:spPr>
-          <a:xfrm>
-            <a:off x="7639050" y="5619750"/>
-            <a:ext cx="9410700" cy="647700"/>
-          </a:xfrm>
-          <a:prstGeom prst="rect">
-            <a:avLst/>
-          </a:prstGeom>
-          <a:noFill/>
-        </p:spPr>
-        <p:txBody>
-          <a:bodyPr wrap="square" lIns="0" rIns="0" tIns="0" bIns="0" anchor="ctr">
-            <a:spAutoFit/>
-          </a:bodyPr>
-          <a:lstStyle/>
-          <a:p>
-            <a:pPr algn="ctr">
-              <a:lnSpc>
-                <a:spcPct val="115000"/>
-              </a:lnSpc>
-            </a:pPr>
-            <a:r>
-              <a:rPr sz="1875" b="0">
-                <a:solidFill>
-                  <a:srgbClr val="3D3D3D"/>
-                </a:solidFill>
-                <a:latin typeface="Pretendard"/>
-                <a:ea typeface="Pretendard"/>
-                <a:cs typeface="Pretendard"/>
-              </a:rPr>
-              <a:t>Google Cloud Storage</a:t>
-            </a:r>
-          </a:p>
-        </p:txBody>
-      </p:sp>
-      <p:sp>
-        <p:nvSpPr>
-          <p:cNvPr id="28" name="TextBox 27"/>
-          <p:cNvSpPr txBox="1"/>
-          <p:nvPr/>
-        </p:nvSpPr>
-        <p:spPr>
-          <a:xfrm>
-            <a:off x="1143000" y="7620000"/>
-            <a:ext cx="16002000" cy="342900"/>
-          </a:xfrm>
-          <a:prstGeom prst="rect">
-            <a:avLst/>
-          </a:prstGeom>
-          <a:noFill/>
-        </p:spPr>
-        <p:txBody>
-          <a:bodyPr wrap="square" lIns="0" rIns="0" tIns="0" bIns="0" anchor="t">
-            <a:spAutoFit/>
-          </a:bodyPr>
-          <a:lstStyle/>
-          <a:p>
-            <a:pPr algn="l">
-              <a:lnSpc>
                 <a:spcPct val="100000"/>
               </a:lnSpc>
             </a:pPr>
             <a:r>
-              <a:rPr sz="1875" b="1">
-                <a:solidFill>
-                  <a:srgbClr val="7D7D7D"/>
-                </a:solidFill>
-                <a:latin typeface="Pretendard"/>
-                <a:ea typeface="Pretendard"/>
-                <a:cs typeface="Pretendard"/>
-              </a:rPr>
-              <a:t>오늘은 s3a://버킷/키 — 버킷 이름은 warehouse, 그 아래 키(경로)가 폴더처럼 보인다</a:t>
-            </a:r>
-          </a:p>
-        </p:txBody>
-      </p:sp>
-      <p:sp>
-        <p:nvSpPr>
-          <p:cNvPr id="29" name="Rectangle 28"/>
+              <a:rPr sz="2250" b="1">
+                <a:solidFill>
+                  <a:srgbClr val="FFFFFF"/>
+                </a:solidFill>
+                <a:latin typeface="Pretendard"/>
+                <a:ea typeface="Pretendard"/>
+                <a:cs typeface="Pretendard"/>
+              </a:rPr>
+              <a:t>VS</a:t>
+            </a:r>
+          </a:p>
+        </p:txBody>
+      </p:sp>
+      <p:sp>
+        <p:nvSpPr>
+          <p:cNvPr id="28" name="Rectangle 27"/>
           <p:cNvSpPr/>
           <p:nvPr/>
         </p:nvSpPr>
@@ -8669,7 +8615,7 @@
       </p:sp>
       <p:sp>
         <p:nvSpPr>
-          <p:cNvPr id="30" name="TextBox 29"/>
+          <p:cNvPr id="29" name="TextBox 28"/>
           <p:cNvSpPr txBox="1"/>
           <p:nvPr/>
         </p:nvSpPr>
@@ -8710,7 +8656,7 @@
       </p:sp>
       <p:sp>
         <p:nvSpPr>
-          <p:cNvPr id="31" name="TextBox 30"/>
+          <p:cNvPr id="30" name="TextBox 29"/>
           <p:cNvSpPr txBox="1"/>
           <p:nvPr/>
         </p:nvSpPr>
@@ -8769,7 +8715,7 @@
       <p:grpSpPr/>
       <p:sp>
         <p:nvSpPr>
-          <p:cNvPr id="2" name="Oval 1"/>
+          <p:cNvPr id="2" name="deckgen:decor"/>
           <p:cNvSpPr/>
           <p:nvPr/>
         </p:nvSpPr>
@@ -8799,7 +8745,7 @@
       </p:sp>
       <p:sp>
         <p:nvSpPr>
-          <p:cNvPr id="3" name="Oval 2"/>
+          <p:cNvPr id="3" name="deckgen:decor"/>
           <p:cNvSpPr/>
           <p:nvPr/>
         </p:nvSpPr>
@@ -8829,7 +8775,7 @@
       </p:sp>
       <p:sp>
         <p:nvSpPr>
-          <p:cNvPr id="4" name="Oval 3"/>
+          <p:cNvPr id="4" name="deckgen:decor"/>
           <p:cNvSpPr/>
           <p:nvPr/>
         </p:nvSpPr>
@@ -8893,7 +8839,7 @@
                 <a:ea typeface="Pretendard"/>
                 <a:cs typeface="Pretendard"/>
               </a:rPr>
-              <a:t>2. 라이브러리 둘</a:t>
+              <a:t>3. 설정</a:t>
             </a:r>
           </a:p>
         </p:txBody>
@@ -8934,7 +8880,7 @@
                 <a:ea typeface="Pretendard"/>
                 <a:cs typeface="Pretendard"/>
               </a:rPr>
-              <a:t>왜 둘인가 — 길과 눈, 둘 다 있어야 레이크하우스</a:t>
+              <a:t>설정 세 덩어리 — 덩어리마다 하는 일</a:t>
             </a:r>
           </a:p>
         </p:txBody>
@@ -8971,100 +8917,18 @@
       </p:sp>
       <p:sp>
         <p:nvSpPr>
-          <p:cNvPr id="8" name="TextBox 7"/>
-          <p:cNvSpPr txBox="1"/>
-          <p:nvPr/>
-        </p:nvSpPr>
-        <p:spPr>
-          <a:xfrm>
-            <a:off x="1143000" y="2857500"/>
-            <a:ext cx="7372350" cy="533400"/>
-          </a:xfrm>
-          <a:prstGeom prst="rect">
-            <a:avLst/>
-          </a:prstGeom>
-          <a:noFill/>
-        </p:spPr>
-        <p:txBody>
-          <a:bodyPr wrap="square" lIns="0" rIns="0" tIns="0" bIns="0" anchor="t">
-            <a:spAutoFit/>
-          </a:bodyPr>
-          <a:lstStyle/>
-          <a:p>
-            <a:pPr algn="l">
-              <a:lnSpc>
-                <a:spcPct val="110000"/>
-              </a:lnSpc>
-            </a:pPr>
-            <a:r>
-              <a:rPr sz="3150" b="1">
-                <a:solidFill>
-                  <a:srgbClr val="0D2B5E"/>
-                </a:solidFill>
-                <a:latin typeface="Pretendard"/>
-                <a:ea typeface="Pretendard"/>
-                <a:cs typeface="Pretendard"/>
-              </a:rPr>
-              <a:t>hadoop-aws — 길</a:t>
-            </a:r>
-          </a:p>
-        </p:txBody>
-      </p:sp>
-      <p:sp>
-        <p:nvSpPr>
-          <p:cNvPr id="9" name="TextBox 8"/>
-          <p:cNvSpPr txBox="1"/>
-          <p:nvPr/>
-        </p:nvSpPr>
-        <p:spPr>
-          <a:xfrm>
-            <a:off x="1143000" y="3467100"/>
-            <a:ext cx="7372350" cy="876300"/>
-          </a:xfrm>
-          <a:prstGeom prst="rect">
-            <a:avLst/>
-          </a:prstGeom>
-          <a:noFill/>
-        </p:spPr>
-        <p:txBody>
-          <a:bodyPr wrap="square" lIns="0" rIns="0" tIns="0" bIns="0" anchor="t">
-            <a:spAutoFit/>
-          </a:bodyPr>
-          <a:lstStyle/>
-          <a:p>
-            <a:pPr algn="l">
-              <a:lnSpc>
-                <a:spcPct val="146000"/>
-              </a:lnSpc>
-            </a:pPr>
-            <a:r>
-              <a:rPr sz="2250" b="0">
-                <a:solidFill>
-                  <a:srgbClr val="3D3D3D"/>
-                </a:solidFill>
-                <a:latin typeface="Pretendard"/>
-                <a:ea typeface="Pretendard"/>
-                <a:cs typeface="Pretendard"/>
-              </a:rPr>
-              <a:t>s3a 어댑터 본체, 스토리지에 닿는 길</a:t>
-            </a:r>
-          </a:p>
-        </p:txBody>
-      </p:sp>
-      <p:sp>
-        <p:nvSpPr>
-          <p:cNvPr id="10" name="Rounded Rectangle 9"/>
-          <p:cNvSpPr/>
-          <p:nvPr/>
-        </p:nvSpPr>
-        <p:spPr>
-          <a:xfrm>
-            <a:off x="1143000" y="4610100"/>
-            <a:ext cx="7372350" cy="2857500"/>
+          <p:cNvPr id="8" name="Rounded Rectangle 7"/>
+          <p:cNvSpPr/>
+          <p:nvPr/>
+        </p:nvSpPr>
+        <p:spPr>
+          <a:xfrm>
+            <a:off x="1143000" y="2933700"/>
+            <a:ext cx="11430000" cy="1095375"/>
           </a:xfrm>
           <a:prstGeom prst="roundRect">
             <a:avLst>
-              <a:gd name="adj" fmla="val 1666"/>
+              <a:gd name="adj" fmla="val 4347"/>
             </a:avLst>
           </a:prstGeom>
           <a:solidFill>
@@ -9087,20 +8951,20 @@
       </p:sp>
       <p:sp>
         <p:nvSpPr>
-          <p:cNvPr id="11" name="Oval 10"/>
-          <p:cNvSpPr/>
-          <p:nvPr/>
-        </p:nvSpPr>
-        <p:spPr>
-          <a:xfrm>
-            <a:off x="1447800" y="5016817"/>
-            <a:ext cx="97155" cy="97155"/>
+          <p:cNvPr id="9" name="Oval 8"/>
+          <p:cNvSpPr/>
+          <p:nvPr/>
+        </p:nvSpPr>
+        <p:spPr>
+          <a:xfrm>
+            <a:off x="1447800" y="3181350"/>
+            <a:ext cx="590550" cy="590550"/>
           </a:xfrm>
           <a:prstGeom prst="ellipse">
             <a:avLst/>
           </a:prstGeom>
           <a:solidFill>
-            <a:srgbClr val="1E5BC6"/>
+            <a:srgbClr val="0D2B5E"/>
           </a:solidFill>
           <a:ln>
             <a:noFill/>
@@ -9117,22 +8981,104 @@
       </p:sp>
       <p:sp>
         <p:nvSpPr>
+          <p:cNvPr id="10" name="TextBox 9"/>
+          <p:cNvSpPr txBox="1"/>
+          <p:nvPr/>
+        </p:nvSpPr>
+        <p:spPr>
+          <a:xfrm>
+            <a:off x="1447800" y="3333750"/>
+            <a:ext cx="590550" cy="323850"/>
+          </a:xfrm>
+          <a:prstGeom prst="rect">
+            <a:avLst/>
+          </a:prstGeom>
+          <a:noFill/>
+        </p:spPr>
+        <p:txBody>
+          <a:bodyPr wrap="square" lIns="0" rIns="0" tIns="0" bIns="0" anchor="t">
+            <a:spAutoFit/>
+          </a:bodyPr>
+          <a:lstStyle/>
+          <a:p>
+            <a:pPr algn="ctr">
+              <a:lnSpc>
+                <a:spcPct val="100000"/>
+              </a:lnSpc>
+            </a:pPr>
+            <a:r>
+              <a:rPr sz="2250" b="1">
+                <a:solidFill>
+                  <a:srgbClr val="FFFFFF"/>
+                </a:solidFill>
+                <a:latin typeface="Pretendard"/>
+                <a:ea typeface="Pretendard"/>
+                <a:cs typeface="Pretendard"/>
+              </a:rPr>
+              <a:t>1</a:t>
+            </a:r>
+          </a:p>
+        </p:txBody>
+      </p:sp>
+      <p:sp>
+        <p:nvSpPr>
+          <p:cNvPr id="11" name="TextBox 10"/>
+          <p:cNvSpPr txBox="1"/>
+          <p:nvPr/>
+        </p:nvSpPr>
+        <p:spPr>
+          <a:xfrm>
+            <a:off x="2324100" y="3143250"/>
+            <a:ext cx="9906000" cy="400050"/>
+          </a:xfrm>
+          <a:prstGeom prst="rect">
+            <a:avLst/>
+          </a:prstGeom>
+          <a:noFill/>
+        </p:spPr>
+        <p:txBody>
+          <a:bodyPr wrap="square" lIns="0" rIns="0" tIns="0" bIns="0" anchor="t">
+            <a:spAutoFit/>
+          </a:bodyPr>
+          <a:lstStyle/>
+          <a:p>
+            <a:pPr algn="l">
+              <a:lnSpc>
+                <a:spcPct val="110000"/>
+              </a:lnSpc>
+            </a:pPr>
+            <a:r>
+              <a:rPr sz="2475" b="1">
+                <a:solidFill>
+                  <a:srgbClr val="0D2B5E"/>
+                </a:solidFill>
+                <a:latin typeface="Pretendard"/>
+                <a:ea typeface="Pretendard"/>
+                <a:cs typeface="Pretendard"/>
+              </a:rPr>
+              <a:t>(1) 스토리지에 닿는 길</a:t>
+            </a:r>
+          </a:p>
+        </p:txBody>
+      </p:sp>
+      <p:sp>
+        <p:nvSpPr>
           <p:cNvPr id="12" name="TextBox 11"/>
           <p:cNvSpPr txBox="1"/>
           <p:nvPr/>
         </p:nvSpPr>
         <p:spPr>
           <a:xfrm>
-            <a:off x="1633538" y="4838700"/>
-            <a:ext cx="6634162" cy="453390"/>
-          </a:xfrm>
-          <a:prstGeom prst="rect">
-            <a:avLst/>
-          </a:prstGeom>
-          <a:noFill/>
-        </p:spPr>
-        <p:txBody>
-          <a:bodyPr wrap="square" lIns="0" rIns="0" tIns="0" bIns="0" anchor="ctr">
+            <a:off x="2324100" y="3543300"/>
+            <a:ext cx="9906000" cy="361950"/>
+          </a:xfrm>
+          <a:prstGeom prst="rect">
+            <a:avLst/>
+          </a:prstGeom>
+          <a:noFill/>
+        </p:spPr>
+        <p:txBody>
+          <a:bodyPr wrap="square" lIns="0" rIns="0" tIns="0" bIns="0" anchor="t">
             <a:spAutoFit/>
           </a:bodyPr>
           <a:lstStyle/>
@@ -9143,7 +9089,7 @@
               </a:lnSpc>
             </a:pPr>
             <a:r>
-              <a:rPr sz="1575" b="0">
+              <a:rPr sz="2025" b="0">
                 <a:solidFill>
                   <a:srgbClr val="3D3D3D"/>
                 </a:solidFill>
@@ -9151,249 +9097,25 @@
                 <a:ea typeface="Pretendard"/>
                 <a:cs typeface="Pretendard"/>
               </a:rPr>
-              <a:t>s3a:// 주소로 읽고 쓰기</a:t>
-            </a:r>
-          </a:p>
-        </p:txBody>
-      </p:sp>
-      <p:sp>
-        <p:nvSpPr>
-          <p:cNvPr id="13" name="Oval 12"/>
-          <p:cNvSpPr/>
-          <p:nvPr/>
-        </p:nvSpPr>
-        <p:spPr>
-          <a:xfrm>
-            <a:off x="1447800" y="5527358"/>
-            <a:ext cx="97155" cy="97155"/>
-          </a:xfrm>
-          <a:prstGeom prst="ellipse">
-            <a:avLst/>
-          </a:prstGeom>
-          <a:solidFill>
-            <a:srgbClr val="1E5BC6"/>
-          </a:solidFill>
-          <a:ln>
-            <a:noFill/>
-          </a:ln>
-          <a:effectLst/>
-        </p:spPr>
-        <p:txBody>
-          <a:bodyPr rtlCol="0" anchor="ctr" wrap="square"/>
-          <a:lstStyle/>
-          <a:p>
-            <a:pPr algn="ctr"/>
-          </a:p>
-        </p:txBody>
-      </p:sp>
-      <p:sp>
-        <p:nvSpPr>
-          <p:cNvPr id="14" name="TextBox 13"/>
-          <p:cNvSpPr txBox="1"/>
-          <p:nvPr/>
-        </p:nvSpPr>
-        <p:spPr>
-          <a:xfrm>
-            <a:off x="1633538" y="5349240"/>
-            <a:ext cx="6634162" cy="453390"/>
-          </a:xfrm>
-          <a:prstGeom prst="rect">
-            <a:avLst/>
-          </a:prstGeom>
-          <a:noFill/>
-        </p:spPr>
-        <p:txBody>
-          <a:bodyPr wrap="square" lIns="0" rIns="0" tIns="0" bIns="0" anchor="ctr">
-            <a:spAutoFit/>
-          </a:bodyPr>
-          <a:lstStyle/>
-          <a:p>
-            <a:pPr algn="l">
-              <a:lnSpc>
-                <a:spcPct val="120000"/>
-              </a:lnSpc>
-            </a:pPr>
-            <a:r>
-              <a:rPr sz="1575" b="0">
-                <a:solidFill>
-                  <a:srgbClr val="3D3D3D"/>
-                </a:solidFill>
-                <a:latin typeface="Pretendard"/>
-                <a:ea typeface="Pretendard"/>
-                <a:cs typeface="Pretendard"/>
-              </a:rPr>
-              <a:t>없으면 ClassNotFoundException</a:t>
-            </a:r>
-          </a:p>
-        </p:txBody>
-      </p:sp>
-      <p:sp>
-        <p:nvSpPr>
-          <p:cNvPr id="15" name="Oval 14"/>
-          <p:cNvSpPr/>
-          <p:nvPr/>
-        </p:nvSpPr>
-        <p:spPr>
-          <a:xfrm>
-            <a:off x="1447800" y="6037898"/>
-            <a:ext cx="97155" cy="97155"/>
-          </a:xfrm>
-          <a:prstGeom prst="ellipse">
-            <a:avLst/>
-          </a:prstGeom>
-          <a:solidFill>
-            <a:srgbClr val="1E5BC6"/>
-          </a:solidFill>
-          <a:ln>
-            <a:noFill/>
-          </a:ln>
-          <a:effectLst/>
-        </p:spPr>
-        <p:txBody>
-          <a:bodyPr rtlCol="0" anchor="ctr" wrap="square"/>
-          <a:lstStyle/>
-          <a:p>
-            <a:pPr algn="ctr"/>
-          </a:p>
-        </p:txBody>
-      </p:sp>
-      <p:sp>
-        <p:nvSpPr>
-          <p:cNvPr id="16" name="TextBox 15"/>
-          <p:cNvSpPr txBox="1"/>
-          <p:nvPr/>
-        </p:nvSpPr>
-        <p:spPr>
-          <a:xfrm>
-            <a:off x="1633538" y="5859780"/>
-            <a:ext cx="6634162" cy="453390"/>
-          </a:xfrm>
-          <a:prstGeom prst="rect">
-            <a:avLst/>
-          </a:prstGeom>
-          <a:noFill/>
-        </p:spPr>
-        <p:txBody>
-          <a:bodyPr wrap="square" lIns="0" rIns="0" tIns="0" bIns="0" anchor="ctr">
-            <a:spAutoFit/>
-          </a:bodyPr>
-          <a:lstStyle/>
-          <a:p>
-            <a:pPr algn="l">
-              <a:lnSpc>
-                <a:spcPct val="120000"/>
-              </a:lnSpc>
-            </a:pPr>
-            <a:r>
-              <a:rPr sz="1575" b="0">
-                <a:solidFill>
-                  <a:srgbClr val="3D3D3D"/>
-                </a:solidFill>
-                <a:latin typeface="Pretendard"/>
-                <a:ea typeface="Pretendard"/>
-                <a:cs typeface="Pretendard"/>
-              </a:rPr>
-              <a:t>S3AFileSystem 을 못 찾는다</a:t>
-            </a:r>
-          </a:p>
-        </p:txBody>
-      </p:sp>
-      <p:sp>
-        <p:nvSpPr>
-          <p:cNvPr id="17" name="TextBox 16"/>
-          <p:cNvSpPr txBox="1"/>
-          <p:nvPr/>
-        </p:nvSpPr>
-        <p:spPr>
-          <a:xfrm>
-            <a:off x="9772650" y="2857500"/>
-            <a:ext cx="7372350" cy="533400"/>
-          </a:xfrm>
-          <a:prstGeom prst="rect">
-            <a:avLst/>
-          </a:prstGeom>
-          <a:noFill/>
-        </p:spPr>
-        <p:txBody>
-          <a:bodyPr wrap="square" lIns="0" rIns="0" tIns="0" bIns="0" anchor="t">
-            <a:spAutoFit/>
-          </a:bodyPr>
-          <a:lstStyle/>
-          <a:p>
-            <a:pPr algn="l">
-              <a:lnSpc>
-                <a:spcPct val="110000"/>
-              </a:lnSpc>
-            </a:pPr>
-            <a:r>
-              <a:rPr sz="3150" b="1">
-                <a:solidFill>
-                  <a:srgbClr val="0D2B5E"/>
-                </a:solidFill>
-                <a:latin typeface="Pretendard"/>
-                <a:ea typeface="Pretendard"/>
-                <a:cs typeface="Pretendard"/>
-              </a:rPr>
-              <a:t>iceberg-spark-runtime — 눈</a:t>
-            </a:r>
-          </a:p>
-        </p:txBody>
-      </p:sp>
-      <p:sp>
-        <p:nvSpPr>
-          <p:cNvPr id="18" name="TextBox 17"/>
-          <p:cNvSpPr txBox="1"/>
-          <p:nvPr/>
-        </p:nvSpPr>
-        <p:spPr>
-          <a:xfrm>
-            <a:off x="9772650" y="3467100"/>
-            <a:ext cx="7372350" cy="876300"/>
-          </a:xfrm>
-          <a:prstGeom prst="rect">
-            <a:avLst/>
-          </a:prstGeom>
-          <a:noFill/>
-        </p:spPr>
-        <p:txBody>
-          <a:bodyPr wrap="square" lIns="0" rIns="0" tIns="0" bIns="0" anchor="t">
-            <a:spAutoFit/>
-          </a:bodyPr>
-          <a:lstStyle/>
-          <a:p>
-            <a:pPr algn="l">
-              <a:lnSpc>
-                <a:spcPct val="146000"/>
-              </a:lnSpc>
-            </a:pPr>
-            <a:r>
-              <a:rPr sz="2250" b="0">
-                <a:solidFill>
-                  <a:srgbClr val="3D3D3D"/>
-                </a:solidFill>
-                <a:latin typeface="Pretendard"/>
-                <a:ea typeface="Pretendard"/>
-                <a:cs typeface="Pretendard"/>
-              </a:rPr>
-              <a:t>파일 무더기를 「테이블」로 읽는 번역기</a:t>
-            </a:r>
-          </a:p>
-        </p:txBody>
-      </p:sp>
-      <p:sp>
-        <p:nvSpPr>
-          <p:cNvPr id="19" name="Rounded Rectangle 18"/>
-          <p:cNvSpPr/>
-          <p:nvPr/>
-        </p:nvSpPr>
-        <p:spPr>
-          <a:xfrm>
-            <a:off x="9772650" y="4610100"/>
-            <a:ext cx="7372350" cy="2857500"/>
+              <a:t>endpoint · access.key · secret.key · path.style.access — 4-3 과 같다</a:t>
+            </a:r>
+          </a:p>
+        </p:txBody>
+      </p:sp>
+      <p:sp>
+        <p:nvSpPr>
+          <p:cNvPr id="13" name="Rounded Rectangle 12"/>
+          <p:cNvSpPr/>
+          <p:nvPr/>
+        </p:nvSpPr>
+        <p:spPr>
+          <a:xfrm>
+            <a:off x="1143000" y="4200525"/>
+            <a:ext cx="11430000" cy="1095375"/>
           </a:xfrm>
           <a:prstGeom prst="roundRect">
             <a:avLst>
-              <a:gd name="adj" fmla="val 1666"/>
+              <a:gd name="adj" fmla="val 4347"/>
             </a:avLst>
           </a:prstGeom>
           <a:solidFill>
@@ -9416,20 +9138,20 @@
       </p:sp>
       <p:sp>
         <p:nvSpPr>
-          <p:cNvPr id="20" name="Oval 19"/>
-          <p:cNvSpPr/>
-          <p:nvPr/>
-        </p:nvSpPr>
-        <p:spPr>
-          <a:xfrm>
-            <a:off x="10077450" y="5016817"/>
-            <a:ext cx="97155" cy="97155"/>
+          <p:cNvPr id="14" name="Oval 13"/>
+          <p:cNvSpPr/>
+          <p:nvPr/>
+        </p:nvSpPr>
+        <p:spPr>
+          <a:xfrm>
+            <a:off x="1447800" y="4448175"/>
+            <a:ext cx="590550" cy="590550"/>
           </a:xfrm>
           <a:prstGeom prst="ellipse">
             <a:avLst/>
           </a:prstGeom>
           <a:solidFill>
-            <a:srgbClr val="1E5BC6"/>
+            <a:srgbClr val="0D2B5E"/>
           </a:solidFill>
           <a:ln>
             <a:noFill/>
@@ -9446,33 +9168,115 @@
       </p:sp>
       <p:sp>
         <p:nvSpPr>
-          <p:cNvPr id="21" name="TextBox 20"/>
-          <p:cNvSpPr txBox="1"/>
-          <p:nvPr/>
-        </p:nvSpPr>
-        <p:spPr>
-          <a:xfrm>
-            <a:off x="10263188" y="4838700"/>
-            <a:ext cx="6634162" cy="453390"/>
-          </a:xfrm>
-          <a:prstGeom prst="rect">
-            <a:avLst/>
-          </a:prstGeom>
-          <a:noFill/>
-        </p:spPr>
-        <p:txBody>
-          <a:bodyPr wrap="square" lIns="0" rIns="0" tIns="0" bIns="0" anchor="ctr">
+          <p:cNvPr id="15" name="TextBox 14"/>
+          <p:cNvSpPr txBox="1"/>
+          <p:nvPr/>
+        </p:nvSpPr>
+        <p:spPr>
+          <a:xfrm>
+            <a:off x="1447800" y="4600575"/>
+            <a:ext cx="590550" cy="323850"/>
+          </a:xfrm>
+          <a:prstGeom prst="rect">
+            <a:avLst/>
+          </a:prstGeom>
+          <a:noFill/>
+        </p:spPr>
+        <p:txBody>
+          <a:bodyPr wrap="square" lIns="0" rIns="0" tIns="0" bIns="0" anchor="t">
+            <a:spAutoFit/>
+          </a:bodyPr>
+          <a:lstStyle/>
+          <a:p>
+            <a:pPr algn="ctr">
+              <a:lnSpc>
+                <a:spcPct val="100000"/>
+              </a:lnSpc>
+            </a:pPr>
+            <a:r>
+              <a:rPr sz="2250" b="1">
+                <a:solidFill>
+                  <a:srgbClr val="FFFFFF"/>
+                </a:solidFill>
+                <a:latin typeface="Pretendard"/>
+                <a:ea typeface="Pretendard"/>
+                <a:cs typeface="Pretendard"/>
+              </a:rPr>
+              <a:t>2</a:t>
+            </a:r>
+          </a:p>
+        </p:txBody>
+      </p:sp>
+      <p:sp>
+        <p:nvSpPr>
+          <p:cNvPr id="16" name="TextBox 15"/>
+          <p:cNvSpPr txBox="1"/>
+          <p:nvPr/>
+        </p:nvSpPr>
+        <p:spPr>
+          <a:xfrm>
+            <a:off x="2324100" y="4410075"/>
+            <a:ext cx="9906000" cy="400050"/>
+          </a:xfrm>
+          <a:prstGeom prst="rect">
+            <a:avLst/>
+          </a:prstGeom>
+          <a:noFill/>
+        </p:spPr>
+        <p:txBody>
+          <a:bodyPr wrap="square" lIns="0" rIns="0" tIns="0" bIns="0" anchor="t">
             <a:spAutoFit/>
           </a:bodyPr>
           <a:lstStyle/>
           <a:p>
             <a:pPr algn="l">
               <a:lnSpc>
+                <a:spcPct val="110000"/>
+              </a:lnSpc>
+            </a:pPr>
+            <a:r>
+              <a:rPr sz="2475" b="1">
+                <a:solidFill>
+                  <a:srgbClr val="0D2B5E"/>
+                </a:solidFill>
+                <a:latin typeface="Pretendard"/>
+                <a:ea typeface="Pretendard"/>
+                <a:cs typeface="Pretendard"/>
+              </a:rPr>
+              <a:t>(2) Iceberg SQL 확장</a:t>
+            </a:r>
+          </a:p>
+        </p:txBody>
+      </p:sp>
+      <p:sp>
+        <p:nvSpPr>
+          <p:cNvPr id="17" name="TextBox 16"/>
+          <p:cNvSpPr txBox="1"/>
+          <p:nvPr/>
+        </p:nvSpPr>
+        <p:spPr>
+          <a:xfrm>
+            <a:off x="2324100" y="4810125"/>
+            <a:ext cx="9906000" cy="361950"/>
+          </a:xfrm>
+          <a:prstGeom prst="rect">
+            <a:avLst/>
+          </a:prstGeom>
+          <a:noFill/>
+        </p:spPr>
+        <p:txBody>
+          <a:bodyPr wrap="square" lIns="0" rIns="0" tIns="0" bIns="0" anchor="t">
+            <a:spAutoFit/>
+          </a:bodyPr>
+          <a:lstStyle/>
+          <a:p>
+            <a:pPr algn="l">
+              <a:lnSpc>
                 <a:spcPct val="120000"/>
               </a:lnSpc>
             </a:pPr>
             <a:r>
-              <a:rPr sz="1575" b="0">
+              <a:rPr sz="2025" b="0">
                 <a:solidFill>
                   <a:srgbClr val="3D3D3D"/>
                 </a:solidFill>
@@ -9480,27 +9284,61 @@
                 <a:ea typeface="Pretendard"/>
                 <a:cs typeface="Pretendard"/>
               </a:rPr>
-              <a:t>Iceberg 테이블 읽고 쓰기 · 메타테이블</a:t>
-            </a:r>
-          </a:p>
-        </p:txBody>
-      </p:sp>
-      <p:sp>
-        <p:nvSpPr>
-          <p:cNvPr id="22" name="Oval 21"/>
-          <p:cNvSpPr/>
-          <p:nvPr/>
-        </p:nvSpPr>
-        <p:spPr>
-          <a:xfrm>
-            <a:off x="10077450" y="5527358"/>
-            <a:ext cx="97155" cy="97155"/>
+              <a:t>spark.sql.extensions — 없으면 MERGE INTO · VERSION AS OF 가 문법 오류</a:t>
+            </a:r>
+          </a:p>
+        </p:txBody>
+      </p:sp>
+      <p:sp>
+        <p:nvSpPr>
+          <p:cNvPr id="18" name="Rounded Rectangle 17"/>
+          <p:cNvSpPr/>
+          <p:nvPr/>
+        </p:nvSpPr>
+        <p:spPr>
+          <a:xfrm>
+            <a:off x="1143000" y="5467350"/>
+            <a:ext cx="11430000" cy="1095375"/>
+          </a:xfrm>
+          <a:prstGeom prst="roundRect">
+            <a:avLst>
+              <a:gd name="adj" fmla="val 4347"/>
+            </a:avLst>
+          </a:prstGeom>
+          <a:solidFill>
+            <a:srgbClr val="FAFBFD"/>
+          </a:solidFill>
+          <a:ln w="9525">
+            <a:solidFill>
+              <a:srgbClr val="DCE1E8"/>
+            </a:solidFill>
+          </a:ln>
+          <a:effectLst/>
+        </p:spPr>
+        <p:txBody>
+          <a:bodyPr rtlCol="0" anchor="ctr" wrap="square"/>
+          <a:lstStyle/>
+          <a:p>
+            <a:pPr algn="ctr"/>
+          </a:p>
+        </p:txBody>
+      </p:sp>
+      <p:sp>
+        <p:nvSpPr>
+          <p:cNvPr id="19" name="Oval 18"/>
+          <p:cNvSpPr/>
+          <p:nvPr/>
+        </p:nvSpPr>
+        <p:spPr>
+          <a:xfrm>
+            <a:off x="1447800" y="5715000"/>
+            <a:ext cx="590550" cy="590550"/>
           </a:xfrm>
           <a:prstGeom prst="ellipse">
             <a:avLst/>
           </a:prstGeom>
           <a:solidFill>
-            <a:srgbClr val="1E5BC6"/>
+            <a:srgbClr val="0D2B5E"/>
           </a:solidFill>
           <a:ln>
             <a:noFill/>
@@ -9517,33 +9355,115 @@
       </p:sp>
       <p:sp>
         <p:nvSpPr>
-          <p:cNvPr id="23" name="TextBox 22"/>
-          <p:cNvSpPr txBox="1"/>
-          <p:nvPr/>
-        </p:nvSpPr>
-        <p:spPr>
-          <a:xfrm>
-            <a:off x="10263188" y="5349240"/>
-            <a:ext cx="6634162" cy="453390"/>
-          </a:xfrm>
-          <a:prstGeom prst="rect">
-            <a:avLst/>
-          </a:prstGeom>
-          <a:noFill/>
-        </p:spPr>
-        <p:txBody>
-          <a:bodyPr wrap="square" lIns="0" rIns="0" tIns="0" bIns="0" anchor="ctr">
+          <p:cNvPr id="20" name="TextBox 19"/>
+          <p:cNvSpPr txBox="1"/>
+          <p:nvPr/>
+        </p:nvSpPr>
+        <p:spPr>
+          <a:xfrm>
+            <a:off x="1447800" y="5867400"/>
+            <a:ext cx="590550" cy="323850"/>
+          </a:xfrm>
+          <a:prstGeom prst="rect">
+            <a:avLst/>
+          </a:prstGeom>
+          <a:noFill/>
+        </p:spPr>
+        <p:txBody>
+          <a:bodyPr wrap="square" lIns="0" rIns="0" tIns="0" bIns="0" anchor="t">
+            <a:spAutoFit/>
+          </a:bodyPr>
+          <a:lstStyle/>
+          <a:p>
+            <a:pPr algn="ctr">
+              <a:lnSpc>
+                <a:spcPct val="100000"/>
+              </a:lnSpc>
+            </a:pPr>
+            <a:r>
+              <a:rPr sz="2250" b="1">
+                <a:solidFill>
+                  <a:srgbClr val="FFFFFF"/>
+                </a:solidFill>
+                <a:latin typeface="Pretendard"/>
+                <a:ea typeface="Pretendard"/>
+                <a:cs typeface="Pretendard"/>
+              </a:rPr>
+              <a:t>3</a:t>
+            </a:r>
+          </a:p>
+        </p:txBody>
+      </p:sp>
+      <p:sp>
+        <p:nvSpPr>
+          <p:cNvPr id="21" name="TextBox 20"/>
+          <p:cNvSpPr txBox="1"/>
+          <p:nvPr/>
+        </p:nvSpPr>
+        <p:spPr>
+          <a:xfrm>
+            <a:off x="2324100" y="5676900"/>
+            <a:ext cx="9906000" cy="400050"/>
+          </a:xfrm>
+          <a:prstGeom prst="rect">
+            <a:avLst/>
+          </a:prstGeom>
+          <a:noFill/>
+        </p:spPr>
+        <p:txBody>
+          <a:bodyPr wrap="square" lIns="0" rIns="0" tIns="0" bIns="0" anchor="t">
             <a:spAutoFit/>
           </a:bodyPr>
           <a:lstStyle/>
           <a:p>
             <a:pPr algn="l">
               <a:lnSpc>
+                <a:spcPct val="110000"/>
+              </a:lnSpc>
+            </a:pPr>
+            <a:r>
+              <a:rPr sz="2475" b="1">
+                <a:solidFill>
+                  <a:srgbClr val="0D2B5E"/>
+                </a:solidFill>
+                <a:latin typeface="Pretendard"/>
+                <a:ea typeface="Pretendard"/>
+                <a:cs typeface="Pretendard"/>
+              </a:rPr>
+              <a:t>(3) 카탈로그 등록</a:t>
+            </a:r>
+          </a:p>
+        </p:txBody>
+      </p:sp>
+      <p:sp>
+        <p:nvSpPr>
+          <p:cNvPr id="22" name="TextBox 21"/>
+          <p:cNvSpPr txBox="1"/>
+          <p:nvPr/>
+        </p:nvSpPr>
+        <p:spPr>
+          <a:xfrm>
+            <a:off x="2324100" y="6076950"/>
+            <a:ext cx="9906000" cy="361950"/>
+          </a:xfrm>
+          <a:prstGeom prst="rect">
+            <a:avLst/>
+          </a:prstGeom>
+          <a:noFill/>
+        </p:spPr>
+        <p:txBody>
+          <a:bodyPr wrap="square" lIns="0" rIns="0" tIns="0" bIns="0" anchor="t">
+            <a:spAutoFit/>
+          </a:bodyPr>
+          <a:lstStyle/>
+          <a:p>
+            <a:pPr algn="l">
+              <a:lnSpc>
                 <a:spcPct val="120000"/>
               </a:lnSpc>
             </a:pPr>
             <a:r>
-              <a:rPr sz="1575" b="0">
+              <a:rPr sz="2025" b="0">
                 <a:solidFill>
                   <a:srgbClr val="3D3D3D"/>
                 </a:solidFill>
@@ -9551,27 +9471,161 @@
                 <a:ea typeface="Pretendard"/>
                 <a:cs typeface="Pretendard"/>
               </a:rPr>
-              <a:t>없으면 USING iceberg 를 모른다</a:t>
-            </a:r>
-          </a:p>
-        </p:txBody>
-      </p:sp>
-      <p:sp>
-        <p:nvSpPr>
-          <p:cNvPr id="24" name="Oval 23"/>
-          <p:cNvSpPr/>
-          <p:nvPr/>
-        </p:nvSpPr>
-        <p:spPr>
-          <a:xfrm>
-            <a:off x="10077450" y="6037898"/>
-            <a:ext cx="97155" cy="97155"/>
-          </a:xfrm>
-          <a:prstGeom prst="ellipse">
-            <a:avLst/>
-          </a:prstGeom>
-          <a:solidFill>
-            <a:srgbClr val="1E5BC6"/>
+              <a:t>lake 는 내가 정한 이름 · type=hadoop · warehouse=s3a://warehouse/lake</a:t>
+            </a:r>
+          </a:p>
+        </p:txBody>
+      </p:sp>
+      <p:sp>
+        <p:nvSpPr>
+          <p:cNvPr id="23" name="Rounded Rectangle 22"/>
+          <p:cNvSpPr/>
+          <p:nvPr/>
+        </p:nvSpPr>
+        <p:spPr>
+          <a:xfrm>
+            <a:off x="13144500" y="2933700"/>
+            <a:ext cx="4000500" cy="3629025"/>
+          </a:xfrm>
+          <a:prstGeom prst="roundRect">
+            <a:avLst>
+              <a:gd name="adj" fmla="val 1312"/>
+            </a:avLst>
+          </a:prstGeom>
+          <a:solidFill>
+            <a:srgbClr val="EDF3FD"/>
+          </a:solidFill>
+          <a:ln w="9525">
+            <a:solidFill>
+              <a:srgbClr val="BFD3F5"/>
+            </a:solidFill>
+          </a:ln>
+          <a:effectLst/>
+        </p:spPr>
+        <p:txBody>
+          <a:bodyPr rtlCol="0" anchor="ctr" wrap="square"/>
+          <a:lstStyle/>
+          <a:p>
+            <a:pPr algn="ctr"/>
+          </a:p>
+        </p:txBody>
+      </p:sp>
+      <p:sp>
+        <p:nvSpPr>
+          <p:cNvPr id="24" name="TextBox 23"/>
+          <p:cNvSpPr txBox="1"/>
+          <p:nvPr/>
+        </p:nvSpPr>
+        <p:spPr>
+          <a:xfrm>
+            <a:off x="13487400" y="3929062"/>
+            <a:ext cx="3314700" cy="304800"/>
+          </a:xfrm>
+          <a:prstGeom prst="rect">
+            <a:avLst/>
+          </a:prstGeom>
+          <a:noFill/>
+        </p:spPr>
+        <p:txBody>
+          <a:bodyPr wrap="square" lIns="0" rIns="0" tIns="0" bIns="0" anchor="t">
+            <a:spAutoFit/>
+          </a:bodyPr>
+          <a:lstStyle/>
+          <a:p>
+            <a:pPr algn="l">
+              <a:lnSpc>
+                <a:spcPct val="100000"/>
+              </a:lnSpc>
+            </a:pPr>
+            <a:r>
+              <a:rPr sz="1800" b="1" spc="190">
+                <a:solidFill>
+                  <a:srgbClr val="1E5BC6"/>
+                </a:solidFill>
+                <a:latin typeface="Pretendard"/>
+                <a:ea typeface="Pretendard"/>
+                <a:cs typeface="Pretendard"/>
+              </a:rPr>
+              <a:t>3.5_2.12 읽기</a:t>
+            </a:r>
+          </a:p>
+        </p:txBody>
+      </p:sp>
+      <p:sp>
+        <p:nvSpPr>
+          <p:cNvPr id="25" name="TextBox 24"/>
+          <p:cNvSpPr txBox="1"/>
+          <p:nvPr/>
+        </p:nvSpPr>
+        <p:spPr>
+          <a:xfrm>
+            <a:off x="13487400" y="4329112"/>
+            <a:ext cx="3314700" cy="1238250"/>
+          </a:xfrm>
+          <a:prstGeom prst="rect">
+            <a:avLst/>
+          </a:prstGeom>
+          <a:noFill/>
+        </p:spPr>
+        <p:txBody>
+          <a:bodyPr wrap="square" lIns="0" rIns="0" tIns="0" bIns="0" anchor="t">
+            <a:spAutoFit/>
+          </a:bodyPr>
+          <a:lstStyle/>
+          <a:p>
+            <a:pPr algn="l">
+              <a:lnSpc>
+                <a:spcPct val="138000"/>
+              </a:lnSpc>
+            </a:pPr>
+            <a:r>
+              <a:rPr sz="2700" b="1">
+                <a:solidFill>
+                  <a:srgbClr val="0D2B5E"/>
+                </a:solidFill>
+                <a:latin typeface="Pretendard"/>
+                <a:ea typeface="Pretendard"/>
+                <a:cs typeface="Pretendard"/>
+              </a:rPr>
+              <a:t>3.5 = Spark</a:t>
+            </a:r>
+          </a:p>
+          <a:p>
+            <a:pPr algn="l">
+              <a:lnSpc>
+                <a:spcPct val="138000"/>
+              </a:lnSpc>
+            </a:pPr>
+            <a:r>
+              <a:rPr sz="2700" b="1">
+                <a:solidFill>
+                  <a:srgbClr val="0D2B5E"/>
+                </a:solidFill>
+                <a:latin typeface="Pretendard"/>
+                <a:ea typeface="Pretendard"/>
+                <a:cs typeface="Pretendard"/>
+              </a:rPr>
+              <a:t>2.12 = Scala</a:t>
+            </a:r>
+          </a:p>
+        </p:txBody>
+      </p:sp>
+      <p:sp>
+        <p:nvSpPr>
+          <p:cNvPr id="26" name="Rectangle 25"/>
+          <p:cNvSpPr/>
+          <p:nvPr/>
+        </p:nvSpPr>
+        <p:spPr>
+          <a:xfrm>
+            <a:off x="1143000" y="7581900"/>
+            <a:ext cx="38100" cy="323850"/>
+          </a:xfrm>
+          <a:prstGeom prst="rect">
+            <a:avLst/>
+          </a:prstGeom>
+          <a:solidFill>
+            <a:srgbClr val="BFD3F5"/>
           </a:solidFill>
           <a:ln>
             <a:noFill/>
@@ -9588,112 +9642,41 @@
       </p:sp>
       <p:sp>
         <p:nvSpPr>
-          <p:cNvPr id="25" name="TextBox 24"/>
-          <p:cNvSpPr txBox="1"/>
-          <p:nvPr/>
-        </p:nvSpPr>
-        <p:spPr>
-          <a:xfrm>
-            <a:off x="10263188" y="5859780"/>
-            <a:ext cx="6634162" cy="453390"/>
-          </a:xfrm>
-          <a:prstGeom prst="rect">
-            <a:avLst/>
-          </a:prstGeom>
-          <a:noFill/>
-        </p:spPr>
-        <p:txBody>
-          <a:bodyPr wrap="square" lIns="0" rIns="0" tIns="0" bIns="0" anchor="ctr">
+          <p:cNvPr id="27" name="TextBox 26"/>
+          <p:cNvSpPr txBox="1"/>
+          <p:nvPr/>
+        </p:nvSpPr>
+        <p:spPr>
+          <a:xfrm>
+            <a:off x="1314450" y="7581900"/>
+            <a:ext cx="15830550" cy="342900"/>
+          </a:xfrm>
+          <a:prstGeom prst="rect">
+            <a:avLst/>
+          </a:prstGeom>
+          <a:noFill/>
+        </p:spPr>
+        <p:txBody>
+          <a:bodyPr wrap="square" lIns="0" rIns="0" tIns="0" bIns="0" anchor="t">
             <a:spAutoFit/>
           </a:bodyPr>
           <a:lstStyle/>
           <a:p>
             <a:pPr algn="l">
               <a:lnSpc>
-                <a:spcPct val="120000"/>
-              </a:lnSpc>
-            </a:pPr>
-            <a:r>
-              <a:rPr sz="1575" b="0">
-                <a:solidFill>
-                  <a:srgbClr val="3D3D3D"/>
-                </a:solidFill>
-                <a:latin typeface="Pretendard"/>
-                <a:ea typeface="Pretendard"/>
-                <a:cs typeface="Pretendard"/>
-              </a:rPr>
-              <a:t>3.5_2.12 = Spark 3.5 · Scala 2.12</a:t>
-            </a:r>
-          </a:p>
-        </p:txBody>
-      </p:sp>
-      <p:sp>
-        <p:nvSpPr>
-          <p:cNvPr id="26" name="Oval 25"/>
-          <p:cNvSpPr/>
-          <p:nvPr/>
-        </p:nvSpPr>
-        <p:spPr>
-          <a:xfrm>
-            <a:off x="8686800" y="3771900"/>
-            <a:ext cx="914400" cy="914400"/>
-          </a:xfrm>
-          <a:prstGeom prst="ellipse">
-            <a:avLst/>
-          </a:prstGeom>
-          <a:solidFill>
-            <a:srgbClr val="0D2B5E"/>
-          </a:solidFill>
-          <a:ln>
-            <a:noFill/>
-          </a:ln>
-          <a:effectLst/>
-        </p:spPr>
-        <p:txBody>
-          <a:bodyPr rtlCol="0" anchor="ctr" wrap="square"/>
-          <a:lstStyle/>
-          <a:p>
-            <a:pPr algn="ctr"/>
-          </a:p>
-        </p:txBody>
-      </p:sp>
-      <p:sp>
-        <p:nvSpPr>
-          <p:cNvPr id="27" name="TextBox 26"/>
-          <p:cNvSpPr txBox="1"/>
-          <p:nvPr/>
-        </p:nvSpPr>
-        <p:spPr>
-          <a:xfrm>
-            <a:off x="8686800" y="4057650"/>
-            <a:ext cx="914400" cy="381000"/>
-          </a:xfrm>
-          <a:prstGeom prst="rect">
-            <a:avLst/>
-          </a:prstGeom>
-          <a:noFill/>
-        </p:spPr>
-        <p:txBody>
-          <a:bodyPr wrap="square" lIns="0" rIns="0" tIns="0" bIns="0" anchor="t">
-            <a:spAutoFit/>
-          </a:bodyPr>
-          <a:lstStyle/>
-          <a:p>
-            <a:pPr algn="ctr">
-              <a:lnSpc>
                 <a:spcPct val="100000"/>
               </a:lnSpc>
             </a:pPr>
             <a:r>
-              <a:rPr sz="2250" b="1">
-                <a:solidFill>
-                  <a:srgbClr val="FFFFFF"/>
-                </a:solidFill>
-                <a:latin typeface="Pretendard"/>
-                <a:ea typeface="Pretendard"/>
-                <a:cs typeface="Pretendard"/>
-              </a:rPr>
-              <a:t>VS</a:t>
+              <a:rPr sz="1725" b="1">
+                <a:solidFill>
+                  <a:srgbClr val="7D7D7D"/>
+                </a:solidFill>
+                <a:latin typeface="Pretendard"/>
+                <a:ea typeface="Pretendard"/>
+                <a:cs typeface="Pretendard"/>
+              </a:rPr>
+              <a:t>Spark 3.5 에 3.4 용 런타임을 넣으면 클래스·메서드를 못 찾는 오류 — 4-3 hadoop-aws 버전 문제와 같은 종류</a:t>
             </a:r>
           </a:p>
         </p:txBody>
@@ -9830,7 +9813,7 @@
       <p:grpSpPr/>
       <p:sp>
         <p:nvSpPr>
-          <p:cNvPr id="2" name="Oval 1"/>
+          <p:cNvPr id="2" name="deckgen:decor"/>
           <p:cNvSpPr/>
           <p:nvPr/>
         </p:nvSpPr>
@@ -9860,7 +9843,7 @@
       </p:sp>
       <p:sp>
         <p:nvSpPr>
-          <p:cNvPr id="3" name="Oval 2"/>
+          <p:cNvPr id="3" name="deckgen:decor"/>
           <p:cNvSpPr/>
           <p:nvPr/>
         </p:nvSpPr>
@@ -9890,7 +9873,7 @@
       </p:sp>
       <p:sp>
         <p:nvSpPr>
-          <p:cNvPr id="4" name="Oval 3"/>
+          <p:cNvPr id="4" name="deckgen:decor"/>
           <p:cNvSpPr/>
           <p:nvPr/>
         </p:nvSpPr>
@@ -9954,7 +9937,7 @@
                 <a:ea typeface="Pretendard"/>
                 <a:cs typeface="Pretendard"/>
               </a:rPr>
-              <a:t>3. 설정</a:t>
+              <a:t>3. 설정 · warehouse</a:t>
             </a:r>
           </a:p>
         </p:txBody>
@@ -9995,7 +9978,7 @@
                 <a:ea typeface="Pretendard"/>
                 <a:cs typeface="Pretendard"/>
               </a:rPr>
-              <a:t>설정 다섯 줄이 하는 일 — 세 덩어리로 읽는다</a:t>
+              <a:t>warehouse 는 버킷 안 폴더 하나로 준다</a:t>
             </a:r>
           </a:p>
         </p:txBody>
@@ -10032,18 +10015,100 @@
       </p:sp>
       <p:sp>
         <p:nvSpPr>
-          <p:cNvPr id="8" name="Rounded Rectangle 7"/>
-          <p:cNvSpPr/>
-          <p:nvPr/>
-        </p:nvSpPr>
-        <p:spPr>
-          <a:xfrm>
-            <a:off x="1143000" y="2933700"/>
-            <a:ext cx="11430000" cy="1095375"/>
+          <p:cNvPr id="8" name="TextBox 7"/>
+          <p:cNvSpPr txBox="1"/>
+          <p:nvPr/>
+        </p:nvSpPr>
+        <p:spPr>
+          <a:xfrm>
+            <a:off x="1143000" y="2857500"/>
+            <a:ext cx="7372350" cy="533400"/>
+          </a:xfrm>
+          <a:prstGeom prst="rect">
+            <a:avLst/>
+          </a:prstGeom>
+          <a:noFill/>
+        </p:spPr>
+        <p:txBody>
+          <a:bodyPr wrap="square" lIns="0" rIns="0" tIns="0" bIns="0" anchor="t">
+            <a:spAutoFit/>
+          </a:bodyPr>
+          <a:lstStyle/>
+          <a:p>
+            <a:pPr algn="l">
+              <a:lnSpc>
+                <a:spcPct val="110000"/>
+              </a:lnSpc>
+            </a:pPr>
+            <a:r>
+              <a:rPr sz="3150" b="1">
+                <a:solidFill>
+                  <a:srgbClr val="0D2B5E"/>
+                </a:solidFill>
+                <a:latin typeface="Pretendard"/>
+                <a:ea typeface="Pretendard"/>
+                <a:cs typeface="Pretendard"/>
+              </a:rPr>
+              <a:t>s3a://warehouse/lake — 오늘</a:t>
+            </a:r>
+          </a:p>
+        </p:txBody>
+      </p:sp>
+      <p:sp>
+        <p:nvSpPr>
+          <p:cNvPr id="9" name="TextBox 8"/>
+          <p:cNvSpPr txBox="1"/>
+          <p:nvPr/>
+        </p:nvSpPr>
+        <p:spPr>
+          <a:xfrm>
+            <a:off x="1143000" y="3467100"/>
+            <a:ext cx="7372350" cy="876300"/>
+          </a:xfrm>
+          <a:prstGeom prst="rect">
+            <a:avLst/>
+          </a:prstGeom>
+          <a:noFill/>
+        </p:spPr>
+        <p:txBody>
+          <a:bodyPr wrap="square" lIns="0" rIns="0" tIns="0" bIns="0" anchor="t">
+            <a:spAutoFit/>
+          </a:bodyPr>
+          <a:lstStyle/>
+          <a:p>
+            <a:pPr algn="l">
+              <a:lnSpc>
+                <a:spcPct val="146000"/>
+              </a:lnSpc>
+            </a:pPr>
+            <a:r>
+              <a:rPr sz="2250" b="0">
+                <a:solidFill>
+                  <a:srgbClr val="3D3D3D"/>
+                </a:solidFill>
+                <a:latin typeface="Pretendard"/>
+                <a:ea typeface="Pretendard"/>
+                <a:cs typeface="Pretendard"/>
+              </a:rPr>
+              <a:t>버킷 warehouse 안의 폴더 lake</a:t>
+            </a:r>
+          </a:p>
+        </p:txBody>
+      </p:sp>
+      <p:sp>
+        <p:nvSpPr>
+          <p:cNvPr id="10" name="Rounded Rectangle 9"/>
+          <p:cNvSpPr/>
+          <p:nvPr/>
+        </p:nvSpPr>
+        <p:spPr>
+          <a:xfrm>
+            <a:off x="1143000" y="4610100"/>
+            <a:ext cx="7372350" cy="2857500"/>
           </a:xfrm>
           <a:prstGeom prst="roundRect">
             <a:avLst>
-              <a:gd name="adj" fmla="val 4347"/>
+              <a:gd name="adj" fmla="val 1666"/>
             </a:avLst>
           </a:prstGeom>
           <a:solidFill>
@@ -10066,20 +10131,20 @@
       </p:sp>
       <p:sp>
         <p:nvSpPr>
-          <p:cNvPr id="9" name="Oval 8"/>
-          <p:cNvSpPr/>
-          <p:nvPr/>
-        </p:nvSpPr>
-        <p:spPr>
-          <a:xfrm>
-            <a:off x="1447800" y="3181350"/>
-            <a:ext cx="590550" cy="590550"/>
+          <p:cNvPr id="11" name="Oval 10"/>
+          <p:cNvSpPr/>
+          <p:nvPr/>
+        </p:nvSpPr>
+        <p:spPr>
+          <a:xfrm>
+            <a:off x="1447800" y="5016817"/>
+            <a:ext cx="97155" cy="97155"/>
           </a:xfrm>
           <a:prstGeom prst="ellipse">
             <a:avLst/>
           </a:prstGeom>
           <a:solidFill>
-            <a:srgbClr val="0D2B5E"/>
+            <a:srgbClr val="1E5BC6"/>
           </a:solidFill>
           <a:ln>
             <a:noFill/>
@@ -10096,14 +10161,197 @@
       </p:sp>
       <p:sp>
         <p:nvSpPr>
-          <p:cNvPr id="10" name="TextBox 9"/>
-          <p:cNvSpPr txBox="1"/>
-          <p:nvPr/>
-        </p:nvSpPr>
-        <p:spPr>
-          <a:xfrm>
-            <a:off x="1447800" y="3333750"/>
-            <a:ext cx="590550" cy="323850"/>
+          <p:cNvPr id="12" name="TextBox 11"/>
+          <p:cNvSpPr txBox="1"/>
+          <p:nvPr/>
+        </p:nvSpPr>
+        <p:spPr>
+          <a:xfrm>
+            <a:off x="1633538" y="4838700"/>
+            <a:ext cx="6634162" cy="453390"/>
+          </a:xfrm>
+          <a:prstGeom prst="rect">
+            <a:avLst/>
+          </a:prstGeom>
+          <a:noFill/>
+        </p:spPr>
+        <p:txBody>
+          <a:bodyPr wrap="square" lIns="0" rIns="0" tIns="0" bIns="0" anchor="ctr">
+            <a:spAutoFit/>
+          </a:bodyPr>
+          <a:lstStyle/>
+          <a:p>
+            <a:pPr algn="l">
+              <a:lnSpc>
+                <a:spcPct val="120000"/>
+              </a:lnSpc>
+            </a:pPr>
+            <a:r>
+              <a:rPr sz="1575" b="0">
+                <a:solidFill>
+                  <a:srgbClr val="3D3D3D"/>
+                </a:solidFill>
+                <a:latin typeface="Pretendard"/>
+                <a:ea typeface="Pretendard"/>
+                <a:cs typeface="Pretendard"/>
+              </a:rPr>
+              <a:t>경로는 warehouse/lake/db/orders/…</a:t>
+            </a:r>
+          </a:p>
+        </p:txBody>
+      </p:sp>
+      <p:sp>
+        <p:nvSpPr>
+          <p:cNvPr id="13" name="Oval 12"/>
+          <p:cNvSpPr/>
+          <p:nvPr/>
+        </p:nvSpPr>
+        <p:spPr>
+          <a:xfrm>
+            <a:off x="1447800" y="5527358"/>
+            <a:ext cx="97155" cy="97155"/>
+          </a:xfrm>
+          <a:prstGeom prst="ellipse">
+            <a:avLst/>
+          </a:prstGeom>
+          <a:solidFill>
+            <a:srgbClr val="1E5BC6"/>
+          </a:solidFill>
+          <a:ln>
+            <a:noFill/>
+          </a:ln>
+          <a:effectLst/>
+        </p:spPr>
+        <p:txBody>
+          <a:bodyPr rtlCol="0" anchor="ctr" wrap="square"/>
+          <a:lstStyle/>
+          <a:p>
+            <a:pPr algn="ctr"/>
+          </a:p>
+        </p:txBody>
+      </p:sp>
+      <p:sp>
+        <p:nvSpPr>
+          <p:cNvPr id="14" name="TextBox 13"/>
+          <p:cNvSpPr txBox="1"/>
+          <p:nvPr/>
+        </p:nvSpPr>
+        <p:spPr>
+          <a:xfrm>
+            <a:off x="1633538" y="5349240"/>
+            <a:ext cx="6634162" cy="453390"/>
+          </a:xfrm>
+          <a:prstGeom prst="rect">
+            <a:avLst/>
+          </a:prstGeom>
+          <a:noFill/>
+        </p:spPr>
+        <p:txBody>
+          <a:bodyPr wrap="square" lIns="0" rIns="0" tIns="0" bIns="0" anchor="ctr">
+            <a:spAutoFit/>
+          </a:bodyPr>
+          <a:lstStyle/>
+          <a:p>
+            <a:pPr algn="l">
+              <a:lnSpc>
+                <a:spcPct val="120000"/>
+              </a:lnSpc>
+            </a:pPr>
+            <a:r>
+              <a:rPr sz="1575" b="0">
+                <a:solidFill>
+                  <a:srgbClr val="3D3D3D"/>
+                </a:solidFill>
+                <a:latin typeface="Pretendard"/>
+                <a:ea typeface="Pretendard"/>
+                <a:cs typeface="Pretendard"/>
+              </a:rPr>
+              <a:t>SHOW TABLES 가 제대로 나온다</a:t>
+            </a:r>
+          </a:p>
+        </p:txBody>
+      </p:sp>
+      <p:sp>
+        <p:nvSpPr>
+          <p:cNvPr id="15" name="Oval 14"/>
+          <p:cNvSpPr/>
+          <p:nvPr/>
+        </p:nvSpPr>
+        <p:spPr>
+          <a:xfrm>
+            <a:off x="1447800" y="6037898"/>
+            <a:ext cx="97155" cy="97155"/>
+          </a:xfrm>
+          <a:prstGeom prst="ellipse">
+            <a:avLst/>
+          </a:prstGeom>
+          <a:solidFill>
+            <a:srgbClr val="1E5BC6"/>
+          </a:solidFill>
+          <a:ln>
+            <a:noFill/>
+          </a:ln>
+          <a:effectLst/>
+        </p:spPr>
+        <p:txBody>
+          <a:bodyPr rtlCol="0" anchor="ctr" wrap="square"/>
+          <a:lstStyle/>
+          <a:p>
+            <a:pPr algn="ctr"/>
+          </a:p>
+        </p:txBody>
+      </p:sp>
+      <p:sp>
+        <p:nvSpPr>
+          <p:cNvPr id="16" name="TextBox 15"/>
+          <p:cNvSpPr txBox="1"/>
+          <p:nvPr/>
+        </p:nvSpPr>
+        <p:spPr>
+          <a:xfrm>
+            <a:off x="1633538" y="5859780"/>
+            <a:ext cx="6634162" cy="453390"/>
+          </a:xfrm>
+          <a:prstGeom prst="rect">
+            <a:avLst/>
+          </a:prstGeom>
+          <a:noFill/>
+        </p:spPr>
+        <p:txBody>
+          <a:bodyPr wrap="square" lIns="0" rIns="0" tIns="0" bIns="0" anchor="ctr">
+            <a:spAutoFit/>
+          </a:bodyPr>
+          <a:lstStyle/>
+          <a:p>
+            <a:pPr algn="l">
+              <a:lnSpc>
+                <a:spcPct val="120000"/>
+              </a:lnSpc>
+            </a:pPr>
+            <a:r>
+              <a:rPr sz="1575" b="0">
+                <a:solidFill>
+                  <a:srgbClr val="3D3D3D"/>
+                </a:solidFill>
+                <a:latin typeface="Pretendard"/>
+                <a:ea typeface="Pretendard"/>
+                <a:cs typeface="Pretendard"/>
+              </a:rPr>
+              <a:t>SQL 에서는 lake.db.orders 로 부른다</a:t>
+            </a:r>
+          </a:p>
+        </p:txBody>
+      </p:sp>
+      <p:sp>
+        <p:nvSpPr>
+          <p:cNvPr id="17" name="TextBox 16"/>
+          <p:cNvSpPr txBox="1"/>
+          <p:nvPr/>
+        </p:nvSpPr>
+        <p:spPr>
+          <a:xfrm>
+            <a:off x="9772650" y="2857500"/>
+            <a:ext cx="7372350" cy="533400"/>
           </a:xfrm>
           <a:prstGeom prst="rect">
             <a:avLst/>
@@ -10116,35 +10364,35 @@
           </a:bodyPr>
           <a:lstStyle/>
           <a:p>
-            <a:pPr algn="ctr">
-              <a:lnSpc>
-                <a:spcPct val="100000"/>
-              </a:lnSpc>
-            </a:pPr>
-            <a:r>
-              <a:rPr sz="2250" b="1">
-                <a:solidFill>
-                  <a:srgbClr val="FFFFFF"/>
-                </a:solidFill>
-                <a:latin typeface="Pretendard"/>
-                <a:ea typeface="Pretendard"/>
-                <a:cs typeface="Pretendard"/>
-              </a:rPr>
-              <a:t>1</a:t>
-            </a:r>
-          </a:p>
-        </p:txBody>
-      </p:sp>
-      <p:sp>
-        <p:nvSpPr>
-          <p:cNvPr id="11" name="TextBox 10"/>
-          <p:cNvSpPr txBox="1"/>
-          <p:nvPr/>
-        </p:nvSpPr>
-        <p:spPr>
-          <a:xfrm>
-            <a:off x="2324100" y="3143250"/>
-            <a:ext cx="9906000" cy="400050"/>
+            <a:pPr algn="l">
+              <a:lnSpc>
+                <a:spcPct val="110000"/>
+              </a:lnSpc>
+            </a:pPr>
+            <a:r>
+              <a:rPr sz="3150" b="1">
+                <a:solidFill>
+                  <a:srgbClr val="0D2B5E"/>
+                </a:solidFill>
+                <a:latin typeface="Pretendard"/>
+                <a:ea typeface="Pretendard"/>
+                <a:cs typeface="Pretendard"/>
+              </a:rPr>
+              <a:t>s3a://warehouse/ — 버킷 바로 아래</a:t>
+            </a:r>
+          </a:p>
+        </p:txBody>
+      </p:sp>
+      <p:sp>
+        <p:nvSpPr>
+          <p:cNvPr id="18" name="TextBox 17"/>
+          <p:cNvSpPr txBox="1"/>
+          <p:nvPr/>
+        </p:nvSpPr>
+        <p:spPr>
+          <a:xfrm>
+            <a:off x="9772650" y="3467100"/>
+            <a:ext cx="7372350" cy="876300"/>
           </a:xfrm>
           <a:prstGeom prst="rect">
             <a:avLst/>
@@ -10159,52 +10407,11 @@
           <a:p>
             <a:pPr algn="l">
               <a:lnSpc>
-                <a:spcPct val="110000"/>
-              </a:lnSpc>
-            </a:pPr>
-            <a:r>
-              <a:rPr sz="2475" b="1">
-                <a:solidFill>
-                  <a:srgbClr val="0D2B5E"/>
-                </a:solidFill>
-                <a:latin typeface="Pretendard"/>
-                <a:ea typeface="Pretendard"/>
-                <a:cs typeface="Pretendard"/>
-              </a:rPr>
-              <a:t>(1) 스토리지에 닿는 길</a:t>
-            </a:r>
-          </a:p>
-        </p:txBody>
-      </p:sp>
-      <p:sp>
-        <p:nvSpPr>
-          <p:cNvPr id="12" name="TextBox 11"/>
-          <p:cNvSpPr txBox="1"/>
-          <p:nvPr/>
-        </p:nvSpPr>
-        <p:spPr>
-          <a:xfrm>
-            <a:off x="2324100" y="3543300"/>
-            <a:ext cx="9906000" cy="361950"/>
-          </a:xfrm>
-          <a:prstGeom prst="rect">
-            <a:avLst/>
-          </a:prstGeom>
-          <a:noFill/>
-        </p:spPr>
-        <p:txBody>
-          <a:bodyPr wrap="square" lIns="0" rIns="0" tIns="0" bIns="0" anchor="t">
-            <a:spAutoFit/>
-          </a:bodyPr>
-          <a:lstStyle/>
-          <a:p>
-            <a:pPr algn="l">
-              <a:lnSpc>
-                <a:spcPct val="120000"/>
-              </a:lnSpc>
-            </a:pPr>
-            <a:r>
-              <a:rPr sz="2025" b="0">
+                <a:spcPct val="146000"/>
+              </a:lnSpc>
+            </a:pPr>
+            <a:r>
+              <a:rPr sz="2250" b="0">
                 <a:solidFill>
                   <a:srgbClr val="3D3D3D"/>
                 </a:solidFill>
@@ -10212,25 +10419,25 @@
                 <a:ea typeface="Pretendard"/>
                 <a:cs typeface="Pretendard"/>
               </a:rPr>
-              <a:t>endpoint · access.key · secret.key · path.style.access — 4-3 과 같다</a:t>
-            </a:r>
-          </a:p>
-        </p:txBody>
-      </p:sp>
-      <p:sp>
-        <p:nvSpPr>
-          <p:cNvPr id="13" name="Rounded Rectangle 12"/>
-          <p:cNvSpPr/>
-          <p:nvPr/>
-        </p:nvSpPr>
-        <p:spPr>
-          <a:xfrm>
-            <a:off x="1143000" y="4200525"/>
-            <a:ext cx="11430000" cy="1095375"/>
+              <a:t>CREATE TABLE 은 되지만 목록에서 실패</a:t>
+            </a:r>
+          </a:p>
+        </p:txBody>
+      </p:sp>
+      <p:sp>
+        <p:nvSpPr>
+          <p:cNvPr id="19" name="Rounded Rectangle 18"/>
+          <p:cNvSpPr/>
+          <p:nvPr/>
+        </p:nvSpPr>
+        <p:spPr>
+          <a:xfrm>
+            <a:off x="9772650" y="4610100"/>
+            <a:ext cx="7372350" cy="2857500"/>
           </a:xfrm>
           <a:prstGeom prst="roundRect">
             <a:avLst>
-              <a:gd name="adj" fmla="val 4347"/>
+              <a:gd name="adj" fmla="val 1666"/>
             </a:avLst>
           </a:prstGeom>
           <a:solidFill>
@@ -10253,20 +10460,20 @@
       </p:sp>
       <p:sp>
         <p:nvSpPr>
-          <p:cNvPr id="14" name="Oval 13"/>
-          <p:cNvSpPr/>
-          <p:nvPr/>
-        </p:nvSpPr>
-        <p:spPr>
-          <a:xfrm>
-            <a:off x="1447800" y="4448175"/>
-            <a:ext cx="590550" cy="590550"/>
+          <p:cNvPr id="20" name="Oval 19"/>
+          <p:cNvSpPr/>
+          <p:nvPr/>
+        </p:nvSpPr>
+        <p:spPr>
+          <a:xfrm>
+            <a:off x="10077450" y="5016817"/>
+            <a:ext cx="97155" cy="97155"/>
           </a:xfrm>
           <a:prstGeom prst="ellipse">
             <a:avLst/>
           </a:prstGeom>
           <a:solidFill>
-            <a:srgbClr val="0D2B5E"/>
+            <a:srgbClr val="1E5BC6"/>
           </a:solidFill>
           <a:ln>
             <a:noFill/>
@@ -10283,115 +10490,33 @@
       </p:sp>
       <p:sp>
         <p:nvSpPr>
-          <p:cNvPr id="15" name="TextBox 14"/>
-          <p:cNvSpPr txBox="1"/>
-          <p:nvPr/>
-        </p:nvSpPr>
-        <p:spPr>
-          <a:xfrm>
-            <a:off x="1447800" y="4600575"/>
-            <a:ext cx="590550" cy="323850"/>
-          </a:xfrm>
-          <a:prstGeom prst="rect">
-            <a:avLst/>
-          </a:prstGeom>
-          <a:noFill/>
-        </p:spPr>
-        <p:txBody>
-          <a:bodyPr wrap="square" lIns="0" rIns="0" tIns="0" bIns="0" anchor="t">
-            <a:spAutoFit/>
-          </a:bodyPr>
-          <a:lstStyle/>
-          <a:p>
-            <a:pPr algn="ctr">
-              <a:lnSpc>
-                <a:spcPct val="100000"/>
-              </a:lnSpc>
-            </a:pPr>
-            <a:r>
-              <a:rPr sz="2250" b="1">
-                <a:solidFill>
-                  <a:srgbClr val="FFFFFF"/>
-                </a:solidFill>
-                <a:latin typeface="Pretendard"/>
-                <a:ea typeface="Pretendard"/>
-                <a:cs typeface="Pretendard"/>
-              </a:rPr>
-              <a:t>2</a:t>
-            </a:r>
-          </a:p>
-        </p:txBody>
-      </p:sp>
-      <p:sp>
-        <p:nvSpPr>
-          <p:cNvPr id="16" name="TextBox 15"/>
-          <p:cNvSpPr txBox="1"/>
-          <p:nvPr/>
-        </p:nvSpPr>
-        <p:spPr>
-          <a:xfrm>
-            <a:off x="2324100" y="4410075"/>
-            <a:ext cx="9906000" cy="400050"/>
-          </a:xfrm>
-          <a:prstGeom prst="rect">
-            <a:avLst/>
-          </a:prstGeom>
-          <a:noFill/>
-        </p:spPr>
-        <p:txBody>
-          <a:bodyPr wrap="square" lIns="0" rIns="0" tIns="0" bIns="0" anchor="t">
+          <p:cNvPr id="21" name="TextBox 20"/>
+          <p:cNvSpPr txBox="1"/>
+          <p:nvPr/>
+        </p:nvSpPr>
+        <p:spPr>
+          <a:xfrm>
+            <a:off x="10263188" y="4838700"/>
+            <a:ext cx="6634162" cy="453390"/>
+          </a:xfrm>
+          <a:prstGeom prst="rect">
+            <a:avLst/>
+          </a:prstGeom>
+          <a:noFill/>
+        </p:spPr>
+        <p:txBody>
+          <a:bodyPr wrap="square" lIns="0" rIns="0" tIns="0" bIns="0" anchor="ctr">
             <a:spAutoFit/>
           </a:bodyPr>
           <a:lstStyle/>
           <a:p>
             <a:pPr algn="l">
               <a:lnSpc>
-                <a:spcPct val="110000"/>
-              </a:lnSpc>
-            </a:pPr>
-            <a:r>
-              <a:rPr sz="2475" b="1">
-                <a:solidFill>
-                  <a:srgbClr val="0D2B5E"/>
-                </a:solidFill>
-                <a:latin typeface="Pretendard"/>
-                <a:ea typeface="Pretendard"/>
-                <a:cs typeface="Pretendard"/>
-              </a:rPr>
-              <a:t>(2) Iceberg SQL 확장</a:t>
-            </a:r>
-          </a:p>
-        </p:txBody>
-      </p:sp>
-      <p:sp>
-        <p:nvSpPr>
-          <p:cNvPr id="17" name="TextBox 16"/>
-          <p:cNvSpPr txBox="1"/>
-          <p:nvPr/>
-        </p:nvSpPr>
-        <p:spPr>
-          <a:xfrm>
-            <a:off x="2324100" y="4810125"/>
-            <a:ext cx="9906000" cy="361950"/>
-          </a:xfrm>
-          <a:prstGeom prst="rect">
-            <a:avLst/>
-          </a:prstGeom>
-          <a:noFill/>
-        </p:spPr>
-        <p:txBody>
-          <a:bodyPr wrap="square" lIns="0" rIns="0" tIns="0" bIns="0" anchor="t">
-            <a:spAutoFit/>
-          </a:bodyPr>
-          <a:lstStyle/>
-          <a:p>
-            <a:pPr algn="l">
-              <a:lnSpc>
                 <a:spcPct val="120000"/>
               </a:lnSpc>
             </a:pPr>
             <a:r>
-              <a:rPr sz="2025" b="0">
+              <a:rPr sz="1575" b="0">
                 <a:solidFill>
                   <a:srgbClr val="3D3D3D"/>
                 </a:solidFill>
@@ -10399,61 +10524,27 @@
                 <a:ea typeface="Pretendard"/>
                 <a:cs typeface="Pretendard"/>
               </a:rPr>
-              <a:t>spark.sql.extensions — 없으면 MERGE INTO · VERSION AS OF 가 문법 오류</a:t>
-            </a:r>
-          </a:p>
-        </p:txBody>
-      </p:sp>
-      <p:sp>
-        <p:nvSpPr>
-          <p:cNvPr id="18" name="Rounded Rectangle 17"/>
-          <p:cNvSpPr/>
-          <p:nvPr/>
-        </p:nvSpPr>
-        <p:spPr>
-          <a:xfrm>
-            <a:off x="1143000" y="5467350"/>
-            <a:ext cx="11430000" cy="1095375"/>
-          </a:xfrm>
-          <a:prstGeom prst="roundRect">
-            <a:avLst>
-              <a:gd name="adj" fmla="val 4347"/>
-            </a:avLst>
-          </a:prstGeom>
-          <a:solidFill>
-            <a:srgbClr val="FAFBFD"/>
-          </a:solidFill>
-          <a:ln w="9525">
-            <a:solidFill>
-              <a:srgbClr val="DCE1E8"/>
-            </a:solidFill>
-          </a:ln>
-          <a:effectLst/>
-        </p:spPr>
-        <p:txBody>
-          <a:bodyPr rtlCol="0" anchor="ctr" wrap="square"/>
-          <a:lstStyle/>
-          <a:p>
-            <a:pPr algn="ctr"/>
-          </a:p>
-        </p:txBody>
-      </p:sp>
-      <p:sp>
-        <p:nvSpPr>
-          <p:cNvPr id="19" name="Oval 18"/>
-          <p:cNvSpPr/>
-          <p:nvPr/>
-        </p:nvSpPr>
-        <p:spPr>
-          <a:xfrm>
-            <a:off x="1447800" y="5715000"/>
-            <a:ext cx="590550" cy="590550"/>
+              <a:t>SHOW TABLES 가 s3a://warehousedb 를 만든다</a:t>
+            </a:r>
+          </a:p>
+        </p:txBody>
+      </p:sp>
+      <p:sp>
+        <p:nvSpPr>
+          <p:cNvPr id="22" name="Oval 21"/>
+          <p:cNvSpPr/>
+          <p:nvPr/>
+        </p:nvSpPr>
+        <p:spPr>
+          <a:xfrm>
+            <a:off x="10077450" y="5527358"/>
+            <a:ext cx="97155" cy="97155"/>
           </a:xfrm>
           <a:prstGeom prst="ellipse">
             <a:avLst/>
           </a:prstGeom>
           <a:solidFill>
-            <a:srgbClr val="0D2B5E"/>
+            <a:srgbClr val="1E5BC6"/>
           </a:solidFill>
           <a:ln>
             <a:noFill/>
@@ -10470,115 +10561,33 @@
       </p:sp>
       <p:sp>
         <p:nvSpPr>
-          <p:cNvPr id="20" name="TextBox 19"/>
-          <p:cNvSpPr txBox="1"/>
-          <p:nvPr/>
-        </p:nvSpPr>
-        <p:spPr>
-          <a:xfrm>
-            <a:off x="1447800" y="5867400"/>
-            <a:ext cx="590550" cy="323850"/>
-          </a:xfrm>
-          <a:prstGeom prst="rect">
-            <a:avLst/>
-          </a:prstGeom>
-          <a:noFill/>
-        </p:spPr>
-        <p:txBody>
-          <a:bodyPr wrap="square" lIns="0" rIns="0" tIns="0" bIns="0" anchor="t">
-            <a:spAutoFit/>
-          </a:bodyPr>
-          <a:lstStyle/>
-          <a:p>
-            <a:pPr algn="ctr">
-              <a:lnSpc>
-                <a:spcPct val="100000"/>
-              </a:lnSpc>
-            </a:pPr>
-            <a:r>
-              <a:rPr sz="2250" b="1">
-                <a:solidFill>
-                  <a:srgbClr val="FFFFFF"/>
-                </a:solidFill>
-                <a:latin typeface="Pretendard"/>
-                <a:ea typeface="Pretendard"/>
-                <a:cs typeface="Pretendard"/>
-              </a:rPr>
-              <a:t>3</a:t>
-            </a:r>
-          </a:p>
-        </p:txBody>
-      </p:sp>
-      <p:sp>
-        <p:nvSpPr>
-          <p:cNvPr id="21" name="TextBox 20"/>
-          <p:cNvSpPr txBox="1"/>
-          <p:nvPr/>
-        </p:nvSpPr>
-        <p:spPr>
-          <a:xfrm>
-            <a:off x="2324100" y="5676900"/>
-            <a:ext cx="9906000" cy="400050"/>
-          </a:xfrm>
-          <a:prstGeom prst="rect">
-            <a:avLst/>
-          </a:prstGeom>
-          <a:noFill/>
-        </p:spPr>
-        <p:txBody>
-          <a:bodyPr wrap="square" lIns="0" rIns="0" tIns="0" bIns="0" anchor="t">
+          <p:cNvPr id="23" name="TextBox 22"/>
+          <p:cNvSpPr txBox="1"/>
+          <p:nvPr/>
+        </p:nvSpPr>
+        <p:spPr>
+          <a:xfrm>
+            <a:off x="10263188" y="5349240"/>
+            <a:ext cx="6634162" cy="453390"/>
+          </a:xfrm>
+          <a:prstGeom prst="rect">
+            <a:avLst/>
+          </a:prstGeom>
+          <a:noFill/>
+        </p:spPr>
+        <p:txBody>
+          <a:bodyPr wrap="square" lIns="0" rIns="0" tIns="0" bIns="0" anchor="ctr">
             <a:spAutoFit/>
           </a:bodyPr>
           <a:lstStyle/>
           <a:p>
             <a:pPr algn="l">
               <a:lnSpc>
-                <a:spcPct val="110000"/>
-              </a:lnSpc>
-            </a:pPr>
-            <a:r>
-              <a:rPr sz="2475" b="1">
-                <a:solidFill>
-                  <a:srgbClr val="0D2B5E"/>
-                </a:solidFill>
-                <a:latin typeface="Pretendard"/>
-                <a:ea typeface="Pretendard"/>
-                <a:cs typeface="Pretendard"/>
-              </a:rPr>
-              <a:t>(3) 카탈로그 등록</a:t>
-            </a:r>
-          </a:p>
-        </p:txBody>
-      </p:sp>
-      <p:sp>
-        <p:nvSpPr>
-          <p:cNvPr id="22" name="TextBox 21"/>
-          <p:cNvSpPr txBox="1"/>
-          <p:nvPr/>
-        </p:nvSpPr>
-        <p:spPr>
-          <a:xfrm>
-            <a:off x="2324100" y="6076950"/>
-            <a:ext cx="9906000" cy="361950"/>
-          </a:xfrm>
-          <a:prstGeom prst="rect">
-            <a:avLst/>
-          </a:prstGeom>
-          <a:noFill/>
-        </p:spPr>
-        <p:txBody>
-          <a:bodyPr wrap="square" lIns="0" rIns="0" tIns="0" bIns="0" anchor="t">
-            <a:spAutoFit/>
-          </a:bodyPr>
-          <a:lstStyle/>
-          <a:p>
-            <a:pPr algn="l">
-              <a:lnSpc>
                 <a:spcPct val="120000"/>
               </a:lnSpc>
             </a:pPr>
             <a:r>
-              <a:rPr sz="2025" b="0">
+              <a:rPr sz="1575" b="0">
                 <a:solidFill>
                   <a:srgbClr val="3D3D3D"/>
                 </a:solidFill>
@@ -10586,161 +10595,27 @@
                 <a:ea typeface="Pretendard"/>
                 <a:cs typeface="Pretendard"/>
               </a:rPr>
-              <a:t>이름 lake 는 내가 정한다 — 이후 SQL 에서 lake.db.table 로 부른다</a:t>
-            </a:r>
-          </a:p>
-        </p:txBody>
-      </p:sp>
-      <p:sp>
-        <p:nvSpPr>
-          <p:cNvPr id="23" name="Rounded Rectangle 22"/>
-          <p:cNvSpPr/>
-          <p:nvPr/>
-        </p:nvSpPr>
-        <p:spPr>
-          <a:xfrm>
-            <a:off x="13144500" y="2933700"/>
-            <a:ext cx="4000500" cy="3629025"/>
-          </a:xfrm>
-          <a:prstGeom prst="roundRect">
-            <a:avLst>
-              <a:gd name="adj" fmla="val 1312"/>
-            </a:avLst>
-          </a:prstGeom>
-          <a:solidFill>
-            <a:srgbClr val="EDF3FD"/>
-          </a:solidFill>
-          <a:ln w="9525">
-            <a:solidFill>
-              <a:srgbClr val="BFD3F5"/>
-            </a:solidFill>
-          </a:ln>
-          <a:effectLst/>
-        </p:spPr>
-        <p:txBody>
-          <a:bodyPr rtlCol="0" anchor="ctr" wrap="square"/>
-          <a:lstStyle/>
-          <a:p>
-            <a:pPr algn="ctr"/>
-          </a:p>
-        </p:txBody>
-      </p:sp>
-      <p:sp>
-        <p:nvSpPr>
-          <p:cNvPr id="24" name="TextBox 23"/>
-          <p:cNvSpPr txBox="1"/>
-          <p:nvPr/>
-        </p:nvSpPr>
-        <p:spPr>
-          <a:xfrm>
-            <a:off x="13487400" y="3929062"/>
-            <a:ext cx="3314700" cy="304800"/>
-          </a:xfrm>
-          <a:prstGeom prst="rect">
-            <a:avLst/>
-          </a:prstGeom>
-          <a:noFill/>
-        </p:spPr>
-        <p:txBody>
-          <a:bodyPr wrap="square" lIns="0" rIns="0" tIns="0" bIns="0" anchor="t">
-            <a:spAutoFit/>
-          </a:bodyPr>
-          <a:lstStyle/>
-          <a:p>
-            <a:pPr algn="l">
-              <a:lnSpc>
-                <a:spcPct val="100000"/>
-              </a:lnSpc>
-            </a:pPr>
-            <a:r>
-              <a:rPr sz="1800" b="1" spc="190">
-                <a:solidFill>
-                  <a:srgbClr val="1E5BC6"/>
-                </a:solidFill>
-                <a:latin typeface="Pretendard"/>
-                <a:ea typeface="Pretendard"/>
-                <a:cs typeface="Pretendard"/>
-              </a:rPr>
-              <a:t>버전 표기 읽기</a:t>
-            </a:r>
-          </a:p>
-        </p:txBody>
-      </p:sp>
-      <p:sp>
-        <p:nvSpPr>
-          <p:cNvPr id="25" name="TextBox 24"/>
-          <p:cNvSpPr txBox="1"/>
-          <p:nvPr/>
-        </p:nvSpPr>
-        <p:spPr>
-          <a:xfrm>
-            <a:off x="13487400" y="4329112"/>
-            <a:ext cx="3314700" cy="1238250"/>
-          </a:xfrm>
-          <a:prstGeom prst="rect">
-            <a:avLst/>
-          </a:prstGeom>
-          <a:noFill/>
-        </p:spPr>
-        <p:txBody>
-          <a:bodyPr wrap="square" lIns="0" rIns="0" tIns="0" bIns="0" anchor="t">
-            <a:spAutoFit/>
-          </a:bodyPr>
-          <a:lstStyle/>
-          <a:p>
-            <a:pPr algn="l">
-              <a:lnSpc>
-                <a:spcPct val="138000"/>
-              </a:lnSpc>
-            </a:pPr>
-            <a:r>
-              <a:rPr sz="2700" b="1">
-                <a:solidFill>
-                  <a:srgbClr val="0D2B5E"/>
-                </a:solidFill>
-                <a:latin typeface="Pretendard"/>
-                <a:ea typeface="Pretendard"/>
-                <a:cs typeface="Pretendard"/>
-              </a:rPr>
-              <a:t>3.5 = Spark</a:t>
-            </a:r>
-          </a:p>
-          <a:p>
-            <a:pPr algn="l">
-              <a:lnSpc>
-                <a:spcPct val="138000"/>
-              </a:lnSpc>
-            </a:pPr>
-            <a:r>
-              <a:rPr sz="2700" b="1">
-                <a:solidFill>
-                  <a:srgbClr val="0D2B5E"/>
-                </a:solidFill>
-                <a:latin typeface="Pretendard"/>
-                <a:ea typeface="Pretendard"/>
-                <a:cs typeface="Pretendard"/>
-              </a:rPr>
-              <a:t>2.12 = Scala</a:t>
-            </a:r>
-          </a:p>
-        </p:txBody>
-      </p:sp>
-      <p:sp>
-        <p:nvSpPr>
-          <p:cNvPr id="26" name="Rectangle 25"/>
-          <p:cNvSpPr/>
-          <p:nvPr/>
-        </p:nvSpPr>
-        <p:spPr>
-          <a:xfrm>
-            <a:off x="1143000" y="7581900"/>
-            <a:ext cx="38100" cy="323850"/>
-          </a:xfrm>
-          <a:prstGeom prst="rect">
-            <a:avLst/>
-          </a:prstGeom>
-          <a:solidFill>
-            <a:srgbClr val="BFD3F5"/>
+              <a:t>hadoop 카탈로그가 주소를 이어 붙이는 방식</a:t>
+            </a:r>
+          </a:p>
+        </p:txBody>
+      </p:sp>
+      <p:sp>
+        <p:nvSpPr>
+          <p:cNvPr id="24" name="Oval 23"/>
+          <p:cNvSpPr/>
+          <p:nvPr/>
+        </p:nvSpPr>
+        <p:spPr>
+          <a:xfrm>
+            <a:off x="10077450" y="6037898"/>
+            <a:ext cx="97155" cy="97155"/>
+          </a:xfrm>
+          <a:prstGeom prst="ellipse">
+            <a:avLst/>
+          </a:prstGeom>
+          <a:solidFill>
+            <a:srgbClr val="1E5BC6"/>
           </a:solidFill>
           <a:ln>
             <a:noFill/>
@@ -10757,14 +10632,85 @@
       </p:sp>
       <p:sp>
         <p:nvSpPr>
+          <p:cNvPr id="25" name="TextBox 24"/>
+          <p:cNvSpPr txBox="1"/>
+          <p:nvPr/>
+        </p:nvSpPr>
+        <p:spPr>
+          <a:xfrm>
+            <a:off x="10263188" y="5859780"/>
+            <a:ext cx="6634162" cy="453390"/>
+          </a:xfrm>
+          <a:prstGeom prst="rect">
+            <a:avLst/>
+          </a:prstGeom>
+          <a:noFill/>
+        </p:spPr>
+        <p:txBody>
+          <a:bodyPr wrap="square" lIns="0" rIns="0" tIns="0" bIns="0" anchor="ctr">
+            <a:spAutoFit/>
+          </a:bodyPr>
+          <a:lstStyle/>
+          <a:p>
+            <a:pPr algn="l">
+              <a:lnSpc>
+                <a:spcPct val="120000"/>
+              </a:lnSpc>
+            </a:pPr>
+            <a:r>
+              <a:rPr sz="1575" b="0">
+                <a:solidFill>
+                  <a:srgbClr val="3D3D3D"/>
+                </a:solidFill>
+                <a:latin typeface="Pretendard"/>
+                <a:ea typeface="Pretendard"/>
+                <a:cs typeface="Pretendard"/>
+              </a:rPr>
+              <a:t>실측 — 그래서 폴더 하나를 둔다</a:t>
+            </a:r>
+          </a:p>
+        </p:txBody>
+      </p:sp>
+      <p:sp>
+        <p:nvSpPr>
+          <p:cNvPr id="26" name="Oval 25"/>
+          <p:cNvSpPr/>
+          <p:nvPr/>
+        </p:nvSpPr>
+        <p:spPr>
+          <a:xfrm>
+            <a:off x="8686800" y="3771900"/>
+            <a:ext cx="914400" cy="914400"/>
+          </a:xfrm>
+          <a:prstGeom prst="ellipse">
+            <a:avLst/>
+          </a:prstGeom>
+          <a:solidFill>
+            <a:srgbClr val="0D2B5E"/>
+          </a:solidFill>
+          <a:ln>
+            <a:noFill/>
+          </a:ln>
+          <a:effectLst/>
+        </p:spPr>
+        <p:txBody>
+          <a:bodyPr rtlCol="0" anchor="ctr" wrap="square"/>
+          <a:lstStyle/>
+          <a:p>
+            <a:pPr algn="ctr"/>
+          </a:p>
+        </p:txBody>
+      </p:sp>
+      <p:sp>
+        <p:nvSpPr>
           <p:cNvPr id="27" name="TextBox 26"/>
           <p:cNvSpPr txBox="1"/>
           <p:nvPr/>
         </p:nvSpPr>
         <p:spPr>
           <a:xfrm>
-            <a:off x="1314450" y="7581900"/>
-            <a:ext cx="15830550" cy="342900"/>
+            <a:off x="8686800" y="4057650"/>
+            <a:ext cx="914400" cy="381000"/>
           </a:xfrm>
           <a:prstGeom prst="rect">
             <a:avLst/>
@@ -10777,21 +10723,21 @@
           </a:bodyPr>
           <a:lstStyle/>
           <a:p>
-            <a:pPr algn="l">
+            <a:pPr algn="ctr">
               <a:lnSpc>
                 <a:spcPct val="100000"/>
               </a:lnSpc>
             </a:pPr>
             <a:r>
-              <a:rPr sz="1725" b="1">
-                <a:solidFill>
-                  <a:srgbClr val="7D7D7D"/>
-                </a:solidFill>
-                <a:latin typeface="Pretendard"/>
-                <a:ea typeface="Pretendard"/>
-                <a:cs typeface="Pretendard"/>
-              </a:rPr>
-              <a:t>4-4 에서 Trino 의 iceberg.properties 가 하던 일을 Spark 쪽에서 하는 것 — 이름만 다르고 하는 일은 같다</a:t>
+              <a:rPr sz="2250" b="1">
+                <a:solidFill>
+                  <a:srgbClr val="FFFFFF"/>
+                </a:solidFill>
+                <a:latin typeface="Pretendard"/>
+                <a:ea typeface="Pretendard"/>
+                <a:cs typeface="Pretendard"/>
+              </a:rPr>
+              <a:t>VS</a:t>
             </a:r>
           </a:p>
         </p:txBody>
@@ -10928,7 +10874,7 @@
       <p:grpSpPr/>
       <p:sp>
         <p:nvSpPr>
-          <p:cNvPr id="2" name="Oval 1"/>
+          <p:cNvPr id="2" name="deckgen:decor"/>
           <p:cNvSpPr/>
           <p:nvPr/>
         </p:nvSpPr>
@@ -10958,7 +10904,7 @@
       </p:sp>
       <p:sp>
         <p:nvSpPr>
-          <p:cNvPr id="3" name="Oval 2"/>
+          <p:cNvPr id="3" name="deckgen:decor"/>
           <p:cNvSpPr/>
           <p:nvPr/>
         </p:nvSpPr>
@@ -10988,7 +10934,7 @@
       </p:sp>
       <p:sp>
         <p:nvSpPr>
-          <p:cNvPr id="4" name="Oval 3"/>
+          <p:cNvPr id="4" name="deckgen:decor"/>
           <p:cNvSpPr/>
           <p:nvPr/>
         </p:nvSpPr>
@@ -11561,7 +11507,7 @@
                 <a:ea typeface="Pretendard"/>
                 <a:cs typeface="Pretendard"/>
               </a:rPr>
-              <a:t>설정 가장 단순 · 동시 쓰기 약함</a:t>
+              <a:t>가장 단순 · 동시 쓰기 약함 (오늘)</a:t>
             </a:r>
           </a:p>
         </p:txBody>
@@ -11786,7 +11732,7 @@
                 <a:ea typeface="Pretendard"/>
                 <a:cs typeface="Pretendard"/>
               </a:rPr>
-              <a:t>엔진 간 공유에 좋음 (4주차)</a:t>
+              <a:t>엔진 간 공유 (4주차 Spark+Trino)</a:t>
             </a:r>
           </a:p>
         </p:txBody>
@@ -12277,7 +12223,7 @@
                 <a:ea typeface="Pretendard"/>
                 <a:cs typeface="Pretendard"/>
               </a:rPr>
-              <a:t>4주차는 Spark 와 Trino 가 함께 봐야 해서 rest — 오늘은 Spark 혼자라 가장 단순한 hadoop</a:t>
+              <a:t>hadoop 의 전화번호부 = warehouse 폴더 + version-hint.text · rest 로 4주차에 붙이기는 심화</a:t>
             </a:r>
           </a:p>
         </p:txBody>
@@ -12414,7 +12360,7 @@
       <p:grpSpPr/>
       <p:sp>
         <p:nvSpPr>
-          <p:cNvPr id="2" name="Oval 1"/>
+          <p:cNvPr id="2" name="deckgen:decor"/>
           <p:cNvSpPr/>
           <p:nvPr/>
         </p:nvSpPr>
@@ -12444,7 +12390,7 @@
       </p:sp>
       <p:sp>
         <p:nvSpPr>
-          <p:cNvPr id="3" name="Oval 2"/>
+          <p:cNvPr id="3" name="deckgen:decor"/>
           <p:cNvSpPr/>
           <p:nvPr/>
         </p:nvSpPr>
@@ -12474,7 +12420,7 @@
       </p:sp>
       <p:sp>
         <p:nvSpPr>
-          <p:cNvPr id="4" name="Oval 3"/>
+          <p:cNvPr id="4" name="deckgen:decor"/>
           <p:cNvSpPr/>
           <p:nvPr/>
         </p:nvSpPr>
@@ -12796,7 +12742,7 @@
                 <a:ea typeface="Pretendard"/>
                 <a:cs typeface="Pretendard"/>
               </a:rPr>
-              <a:t>http://minio:9000/warehouse/db/…</a:t>
+              <a:t>minio:9000/warehouse/lake/db/…</a:t>
             </a:r>
           </a:p>
         </p:txBody>
@@ -13125,7 +13071,7 @@
                 <a:ea typeface="Pretendard"/>
                 <a:cs typeface="Pretendard"/>
               </a:rPr>
-              <a:t>http://warehouse.s3.amazonaws.com/…</a:t>
+              <a:t>warehouse.s3.amazonaws.com/lake/…</a:t>
             </a:r>
           </a:p>
         </p:txBody>
@@ -13196,7 +13142,7 @@
                 <a:ea typeface="Pretendard"/>
                 <a:cs typeface="Pretendard"/>
               </a:rPr>
-              <a:t>MinIO 는 bucket.host 형태를 못 쓴다</a:t>
+              <a:t>빼면 warehouse.minio 로 붙으려다 실패</a:t>
             </a:r>
           </a:p>
         </p:txBody>
@@ -13267,7 +13213,7 @@
                 <a:ea typeface="Pretendard"/>
                 <a:cs typeface="Pretendard"/>
               </a:rPr>
-              <a:t>옵션을 빼면 UnknownHost 나 403</a:t>
+              <a:t>Unable to execute HTTP request (실측)</a:t>
             </a:r>
           </a:p>
         </p:txBody>
@@ -13475,7 +13421,7 @@
       <p:grpSpPr/>
       <p:sp>
         <p:nvSpPr>
-          <p:cNvPr id="2" name="Oval 1"/>
+          <p:cNvPr id="2" name="deckgen:decor"/>
           <p:cNvSpPr/>
           <p:nvPr/>
         </p:nvSpPr>
@@ -13505,7 +13451,7 @@
       </p:sp>
       <p:sp>
         <p:nvSpPr>
-          <p:cNvPr id="3" name="Oval 2"/>
+          <p:cNvPr id="3" name="deckgen:decor"/>
           <p:cNvSpPr/>
           <p:nvPr/>
         </p:nvSpPr>
@@ -13535,7 +13481,7 @@
       </p:sp>
       <p:sp>
         <p:nvSpPr>
-          <p:cNvPr id="4" name="Oval 3"/>
+          <p:cNvPr id="4" name="deckgen:decor"/>
           <p:cNvSpPr/>
           <p:nvPr/>
         </p:nvSpPr>
